--- a/ClasesPPTX/W06B.pptx
+++ b/ClasesPPTX/W06B.pptx
@@ -1055,7 +1055,7 @@
           </a:pPr>
           <a:r>
             <a:rPr lang="es-CO" dirty="0"/>
-            <a:t>W03</a:t>
+            <a:t>W04</a:t>
           </a:r>
         </a:p>
       </dgm:t>
@@ -1148,7 +1148,7 @@
           </a:pPr>
           <a:r>
             <a:rPr lang="es-CO" dirty="0"/>
-            <a:t>W04</a:t>
+            <a:t>W05</a:t>
           </a:r>
         </a:p>
       </dgm:t>
@@ -1223,7 +1223,7 @@
           </a:pPr>
           <a:r>
             <a:rPr lang="es-CO" dirty="0"/>
-            <a:t>W05A</a:t>
+            <a:t>W06A</a:t>
           </a:r>
         </a:p>
       </dgm:t>
@@ -1298,7 +1298,7 @@
           </a:pPr>
           <a:r>
             <a:rPr lang="es-CO" dirty="0"/>
-            <a:t>W05B</a:t>
+            <a:t>W06B</a:t>
           </a:r>
         </a:p>
       </dgm:t>
@@ -1306,10 +1306,24 @@
     <dgm:pt modelId="{94832D78-9833-41A4-81C5-EF626380929C}" type="parTrans" cxnId="{AF0605B5-6EC5-474B-AF1B-83308F626370}">
       <dgm:prSet/>
       <dgm:spPr/>
+      <dgm:t>
+        <a:bodyPr/>
+        <a:lstStyle/>
+        <a:p>
+          <a:endParaRPr lang="es-CO"/>
+        </a:p>
+      </dgm:t>
     </dgm:pt>
     <dgm:pt modelId="{CEAFE364-1135-476B-A766-6591619D08D7}" type="sibTrans" cxnId="{AF0605B5-6EC5-474B-AF1B-83308F626370}">
       <dgm:prSet/>
       <dgm:spPr/>
+      <dgm:t>
+        <a:bodyPr/>
+        <a:lstStyle/>
+        <a:p>
+          <a:endParaRPr lang="es-CO"/>
+        </a:p>
+      </dgm:t>
     </dgm:pt>
     <dgm:pt modelId="{730198F8-8277-4469-A2E6-D7B60D4E0025}">
       <dgm:prSet/>
@@ -1337,10 +1351,101 @@
     <dgm:pt modelId="{CFB92EED-D2A6-4767-B7AA-6133823B2886}" type="parTrans" cxnId="{A0200E12-295E-4F66-BED2-CEF30ADAA122}">
       <dgm:prSet/>
       <dgm:spPr/>
+      <dgm:t>
+        <a:bodyPr/>
+        <a:lstStyle/>
+        <a:p>
+          <a:endParaRPr lang="es-CO"/>
+        </a:p>
+      </dgm:t>
     </dgm:pt>
     <dgm:pt modelId="{523C5D6A-73AB-4D5D-B396-58B4DA401B5B}" type="sibTrans" cxnId="{A0200E12-295E-4F66-BED2-CEF30ADAA122}">
       <dgm:prSet/>
       <dgm:spPr/>
+      <dgm:t>
+        <a:bodyPr/>
+        <a:lstStyle/>
+        <a:p>
+          <a:endParaRPr lang="es-CO"/>
+        </a:p>
+      </dgm:t>
+    </dgm:pt>
+    <dgm:pt modelId="{55DB74FC-AA14-484C-90C5-272BF72C7E35}">
+      <dgm:prSet/>
+      <dgm:spPr/>
+      <dgm:t>
+        <a:bodyPr/>
+        <a:lstStyle/>
+        <a:p>
+          <a:pPr>
+            <a:defRPr b="1"/>
+          </a:pPr>
+          <a:r>
+            <a:rPr lang="es-CO"/>
+            <a:t>W03</a:t>
+          </a:r>
+          <a:endParaRPr lang="es-CO" dirty="0"/>
+        </a:p>
+      </dgm:t>
+    </dgm:pt>
+    <dgm:pt modelId="{D6AED8D8-0009-4B66-8C28-D0634FC48861}" type="parTrans" cxnId="{48490DA6-498E-4365-AEBE-613B553408D7}">
+      <dgm:prSet/>
+      <dgm:spPr/>
+      <dgm:t>
+        <a:bodyPr/>
+        <a:lstStyle/>
+        <a:p>
+          <a:endParaRPr lang="es-CO"/>
+        </a:p>
+      </dgm:t>
+    </dgm:pt>
+    <dgm:pt modelId="{E93CBD9A-7BE6-4D11-94AD-BFD8DCA9C391}" type="sibTrans" cxnId="{48490DA6-498E-4365-AEBE-613B553408D7}">
+      <dgm:prSet/>
+      <dgm:spPr/>
+      <dgm:t>
+        <a:bodyPr/>
+        <a:lstStyle/>
+        <a:p>
+          <a:endParaRPr lang="es-CO"/>
+        </a:p>
+      </dgm:t>
+    </dgm:pt>
+    <dgm:pt modelId="{5419EDF0-37A9-436C-B8B3-9B4FEA7E70F4}">
+      <dgm:prSet/>
+      <dgm:spPr/>
+      <dgm:t>
+        <a:bodyPr/>
+        <a:lstStyle/>
+        <a:p>
+          <a:r>
+            <a:rPr lang="es-CO"/>
+            <a:t>SQL básico</a:t>
+          </a:r>
+          <a:endParaRPr lang="es-CO" dirty="0"/>
+        </a:p>
+      </dgm:t>
+    </dgm:pt>
+    <dgm:pt modelId="{83343AD1-A745-45E3-BDD5-EFBC3C62047F}" type="parTrans" cxnId="{01786C96-8A2E-4BF3-BEC2-E30FA4ACE245}">
+      <dgm:prSet/>
+      <dgm:spPr/>
+      <dgm:t>
+        <a:bodyPr/>
+        <a:lstStyle/>
+        <a:p>
+          <a:endParaRPr lang="es-CO"/>
+        </a:p>
+      </dgm:t>
+    </dgm:pt>
+    <dgm:pt modelId="{D4F9ACE3-DCE1-4817-BAB7-F6E97CA81E9F}" type="sibTrans" cxnId="{01786C96-8A2E-4BF3-BEC2-E30FA4ACE245}">
+      <dgm:prSet/>
+      <dgm:spPr/>
+      <dgm:t>
+        <a:bodyPr/>
+        <a:lstStyle/>
+        <a:p>
+          <a:endParaRPr lang="es-CO"/>
+        </a:p>
+      </dgm:t>
     </dgm:pt>
     <dgm:pt modelId="{9AE89FB1-F474-491F-AB27-A0F134775DF5}" type="pres">
       <dgm:prSet presAssocID="{2430CC21-05DE-42C5-993E-E946140B4D86}" presName="root" presStyleCnt="0">
@@ -1395,7 +1500,7 @@
       <dgm:spPr/>
     </dgm:pt>
     <dgm:pt modelId="{34DD218C-FBA4-4914-8E86-E286CBBF679B}" type="pres">
-      <dgm:prSet presAssocID="{CF314EE2-D6D7-4536-A6FD-41DF85B6060B}" presName="ConnectorPoint" presStyleLbl="lnNode1" presStyleIdx="0" presStyleCnt="6"/>
+      <dgm:prSet presAssocID="{CF314EE2-D6D7-4536-A6FD-41DF85B6060B}" presName="ConnectorPoint" presStyleLbl="lnNode1" presStyleIdx="0" presStyleCnt="7"/>
       <dgm:spPr>
         <a:solidFill>
           <a:schemeClr val="accent1">
@@ -1425,11 +1530,11 @@
       <dgm:spPr/>
     </dgm:pt>
     <dgm:pt modelId="{90BFAD0B-06DA-4B4F-B83D-5C02B8A89EC4}" type="pres">
-      <dgm:prSet presAssocID="{CF314EE2-D6D7-4536-A6FD-41DF85B6060B}" presName="DropPin" presStyleLbl="alignNode1" presStyleIdx="0" presStyleCnt="12"/>
+      <dgm:prSet presAssocID="{CF314EE2-D6D7-4536-A6FD-41DF85B6060B}" presName="DropPin" presStyleLbl="alignNode1" presStyleIdx="0" presStyleCnt="14"/>
       <dgm:spPr/>
     </dgm:pt>
     <dgm:pt modelId="{3941855B-9F45-4A82-956B-02684A432AA5}" type="pres">
-      <dgm:prSet presAssocID="{CF314EE2-D6D7-4536-A6FD-41DF85B6060B}" presName="Ellipse" presStyleLbl="fgAcc1" presStyleIdx="0" presStyleCnt="6"/>
+      <dgm:prSet presAssocID="{CF314EE2-D6D7-4536-A6FD-41DF85B6060B}" presName="Ellipse" presStyleLbl="fgAcc1" presStyleIdx="0" presStyleCnt="7"/>
       <dgm:spPr>
         <a:solidFill>
           <a:schemeClr val="accent1">
@@ -1449,7 +1554,7 @@
       </dgm:spPr>
     </dgm:pt>
     <dgm:pt modelId="{31877334-3A87-4D72-A1B1-F99AFF9D710D}" type="pres">
-      <dgm:prSet presAssocID="{CF314EE2-D6D7-4536-A6FD-41DF85B6060B}" presName="L2TextContainer" presStyleLbl="revTx" presStyleIdx="0" presStyleCnt="6">
+      <dgm:prSet presAssocID="{CF314EE2-D6D7-4536-A6FD-41DF85B6060B}" presName="L2TextContainer" presStyleLbl="revTx" presStyleIdx="0" presStyleCnt="7">
         <dgm:presLayoutVars>
           <dgm:bulletEnabled val="1"/>
         </dgm:presLayoutVars>
@@ -1457,7 +1562,7 @@
       <dgm:spPr/>
     </dgm:pt>
     <dgm:pt modelId="{01E41ACE-E33B-41B9-A714-73522D3F7C76}" type="pres">
-      <dgm:prSet presAssocID="{CF314EE2-D6D7-4536-A6FD-41DF85B6060B}" presName="L1TextContainer" presStyleLbl="alignNode1" presStyleIdx="1" presStyleCnt="12">
+      <dgm:prSet presAssocID="{CF314EE2-D6D7-4536-A6FD-41DF85B6060B}" presName="L1TextContainer" presStyleLbl="alignNode1" presStyleIdx="1" presStyleCnt="14">
         <dgm:presLayoutVars>
           <dgm:chMax val="1"/>
           <dgm:chPref val="1"/>
@@ -1467,7 +1572,7 @@
       <dgm:spPr/>
     </dgm:pt>
     <dgm:pt modelId="{CEE8CE24-AD73-4777-BAB3-4A5D9CE74308}" type="pres">
-      <dgm:prSet presAssocID="{CF314EE2-D6D7-4536-A6FD-41DF85B6060B}" presName="ConnectLine" presStyleLbl="sibTrans1D1" presStyleIdx="0" presStyleCnt="6"/>
+      <dgm:prSet presAssocID="{CF314EE2-D6D7-4536-A6FD-41DF85B6060B}" presName="ConnectLine" presStyleLbl="sibTrans1D1" presStyleIdx="0" presStyleCnt="7"/>
       <dgm:spPr/>
     </dgm:pt>
     <dgm:pt modelId="{CA0DAB95-CF81-4C72-99EC-F6A08D694850}" type="pres">
@@ -1483,7 +1588,7 @@
       <dgm:spPr/>
     </dgm:pt>
     <dgm:pt modelId="{0D3203CA-3A44-4E67-9918-35447FA83302}" type="pres">
-      <dgm:prSet presAssocID="{DB0F8EA1-4EC9-4B36-B3A0-726A64C3981F}" presName="ConnectorPoint" presStyleLbl="lnNode1" presStyleIdx="1" presStyleCnt="6"/>
+      <dgm:prSet presAssocID="{DB0F8EA1-4EC9-4B36-B3A0-726A64C3981F}" presName="ConnectorPoint" presStyleLbl="lnNode1" presStyleIdx="1" presStyleCnt="7"/>
       <dgm:spPr>
         <a:solidFill>
           <a:schemeClr val="accent1">
@@ -1513,11 +1618,11 @@
       <dgm:spPr/>
     </dgm:pt>
     <dgm:pt modelId="{DC0398C9-F266-4E41-85EE-CAB679514169}" type="pres">
-      <dgm:prSet presAssocID="{DB0F8EA1-4EC9-4B36-B3A0-726A64C3981F}" presName="DropPin" presStyleLbl="alignNode1" presStyleIdx="2" presStyleCnt="12"/>
+      <dgm:prSet presAssocID="{DB0F8EA1-4EC9-4B36-B3A0-726A64C3981F}" presName="DropPin" presStyleLbl="alignNode1" presStyleIdx="2" presStyleCnt="14"/>
       <dgm:spPr/>
     </dgm:pt>
     <dgm:pt modelId="{591D0C9E-F3BD-4ACE-A927-797BE3DA39DF}" type="pres">
-      <dgm:prSet presAssocID="{DB0F8EA1-4EC9-4B36-B3A0-726A64C3981F}" presName="Ellipse" presStyleLbl="fgAcc1" presStyleIdx="1" presStyleCnt="6"/>
+      <dgm:prSet presAssocID="{DB0F8EA1-4EC9-4B36-B3A0-726A64C3981F}" presName="Ellipse" presStyleLbl="fgAcc1" presStyleIdx="1" presStyleCnt="7"/>
       <dgm:spPr>
         <a:solidFill>
           <a:schemeClr val="accent1">
@@ -1537,7 +1642,7 @@
       </dgm:spPr>
     </dgm:pt>
     <dgm:pt modelId="{443870C5-2799-47B5-AA6B-A0C45107D3FC}" type="pres">
-      <dgm:prSet presAssocID="{DB0F8EA1-4EC9-4B36-B3A0-726A64C3981F}" presName="L2TextContainer" presStyleLbl="revTx" presStyleIdx="1" presStyleCnt="6">
+      <dgm:prSet presAssocID="{DB0F8EA1-4EC9-4B36-B3A0-726A64C3981F}" presName="L2TextContainer" presStyleLbl="revTx" presStyleIdx="1" presStyleCnt="7">
         <dgm:presLayoutVars>
           <dgm:bulletEnabled val="1"/>
         </dgm:presLayoutVars>
@@ -1545,7 +1650,7 @@
       <dgm:spPr/>
     </dgm:pt>
     <dgm:pt modelId="{89EF5014-7ECE-4300-A882-B69FFA73745D}" type="pres">
-      <dgm:prSet presAssocID="{DB0F8EA1-4EC9-4B36-B3A0-726A64C3981F}" presName="L1TextContainer" presStyleLbl="alignNode1" presStyleIdx="3" presStyleCnt="12">
+      <dgm:prSet presAssocID="{DB0F8EA1-4EC9-4B36-B3A0-726A64C3981F}" presName="L1TextContainer" presStyleLbl="alignNode1" presStyleIdx="3" presStyleCnt="14">
         <dgm:presLayoutVars>
           <dgm:chMax val="1"/>
           <dgm:chPref val="1"/>
@@ -1555,7 +1660,7 @@
       <dgm:spPr/>
     </dgm:pt>
     <dgm:pt modelId="{7FC7980B-78D1-4A8D-9208-76052E50D81B}" type="pres">
-      <dgm:prSet presAssocID="{DB0F8EA1-4EC9-4B36-B3A0-726A64C3981F}" presName="ConnectLine" presStyleLbl="sibTrans1D1" presStyleIdx="1" presStyleCnt="6"/>
+      <dgm:prSet presAssocID="{DB0F8EA1-4EC9-4B36-B3A0-726A64C3981F}" presName="ConnectLine" presStyleLbl="sibTrans1D1" presStyleIdx="1" presStyleCnt="7"/>
       <dgm:spPr/>
     </dgm:pt>
     <dgm:pt modelId="{2A9B783C-D24D-49E5-BA81-DDD844BCDDD5}" type="pres">
@@ -1566,12 +1671,100 @@
       <dgm:prSet presAssocID="{08BC88D8-82C0-4A30-9ABA-A0DE6ABB8151}" presName="spaceBetweenRectangles" presStyleCnt="0"/>
       <dgm:spPr/>
     </dgm:pt>
+    <dgm:pt modelId="{354A0EB9-C15D-4EED-AD7A-4BA0BD6EA95F}" type="pres">
+      <dgm:prSet presAssocID="{55DB74FC-AA14-484C-90C5-272BF72C7E35}" presName="composite" presStyleCnt="0"/>
+      <dgm:spPr/>
+    </dgm:pt>
+    <dgm:pt modelId="{6B3B44FD-CD55-49A1-9D46-7D8BE7ECC7DC}" type="pres">
+      <dgm:prSet presAssocID="{55DB74FC-AA14-484C-90C5-272BF72C7E35}" presName="ConnectorPoint" presStyleLbl="lnNode1" presStyleIdx="2" presStyleCnt="7"/>
+      <dgm:spPr>
+        <a:solidFill>
+          <a:schemeClr val="accent1">
+            <a:hueOff val="0"/>
+            <a:satOff val="0"/>
+            <a:lumOff val="0"/>
+            <a:alphaOff val="0"/>
+          </a:schemeClr>
+        </a:solidFill>
+        <a:ln w="6350" cap="flat" cmpd="sng" algn="ctr">
+          <a:solidFill>
+            <a:schemeClr val="lt1">
+              <a:hueOff val="0"/>
+              <a:satOff val="0"/>
+              <a:lumOff val="0"/>
+              <a:alphaOff val="0"/>
+            </a:schemeClr>
+          </a:solidFill>
+          <a:prstDash val="solid"/>
+          <a:miter lim="800000"/>
+        </a:ln>
+        <a:effectLst/>
+      </dgm:spPr>
+    </dgm:pt>
+    <dgm:pt modelId="{A462C6F2-48E5-4BD6-909A-4F12CDF07C3F}" type="pres">
+      <dgm:prSet presAssocID="{55DB74FC-AA14-484C-90C5-272BF72C7E35}" presName="DropPinPlaceHolder" presStyleCnt="0"/>
+      <dgm:spPr/>
+    </dgm:pt>
+    <dgm:pt modelId="{7426B390-11A9-467C-8863-3A0BEAE74606}" type="pres">
+      <dgm:prSet presAssocID="{55DB74FC-AA14-484C-90C5-272BF72C7E35}" presName="DropPin" presStyleLbl="alignNode1" presStyleIdx="4" presStyleCnt="14"/>
+      <dgm:spPr/>
+    </dgm:pt>
+    <dgm:pt modelId="{CCC1B053-3ECB-4D6B-98FE-E0527430F655}" type="pres">
+      <dgm:prSet presAssocID="{55DB74FC-AA14-484C-90C5-272BF72C7E35}" presName="Ellipse" presStyleLbl="fgAcc1" presStyleIdx="2" presStyleCnt="7"/>
+      <dgm:spPr>
+        <a:solidFill>
+          <a:schemeClr val="accent1">
+            <a:alpha val="90000"/>
+            <a:hueOff val="0"/>
+            <a:satOff val="0"/>
+            <a:lumOff val="0"/>
+            <a:alphaOff val="0"/>
+          </a:schemeClr>
+        </a:solidFill>
+        <a:ln w="19050" cap="flat" cmpd="sng" algn="ctr">
+          <a:noFill/>
+          <a:prstDash val="solid"/>
+          <a:miter lim="800000"/>
+        </a:ln>
+        <a:effectLst/>
+      </dgm:spPr>
+    </dgm:pt>
+    <dgm:pt modelId="{0C33ADDC-85D4-4DBF-83AE-CB3AB9747E6D}" type="pres">
+      <dgm:prSet presAssocID="{55DB74FC-AA14-484C-90C5-272BF72C7E35}" presName="L2TextContainer" presStyleLbl="revTx" presStyleIdx="2" presStyleCnt="7">
+        <dgm:presLayoutVars>
+          <dgm:bulletEnabled val="1"/>
+        </dgm:presLayoutVars>
+      </dgm:prSet>
+      <dgm:spPr/>
+    </dgm:pt>
+    <dgm:pt modelId="{F60B4A9E-2A40-44D1-A1A8-F4A47B5C2960}" type="pres">
+      <dgm:prSet presAssocID="{55DB74FC-AA14-484C-90C5-272BF72C7E35}" presName="L1TextContainer" presStyleLbl="alignNode1" presStyleIdx="5" presStyleCnt="14">
+        <dgm:presLayoutVars>
+          <dgm:chMax val="1"/>
+          <dgm:chPref val="1"/>
+          <dgm:bulletEnabled val="1"/>
+        </dgm:presLayoutVars>
+      </dgm:prSet>
+      <dgm:spPr/>
+    </dgm:pt>
+    <dgm:pt modelId="{46D358C1-2023-4C84-9A53-DF8EDD80A1F7}" type="pres">
+      <dgm:prSet presAssocID="{55DB74FC-AA14-484C-90C5-272BF72C7E35}" presName="ConnectLine" presStyleLbl="sibTrans1D1" presStyleIdx="2" presStyleCnt="7"/>
+      <dgm:spPr/>
+    </dgm:pt>
+    <dgm:pt modelId="{91C0AD43-BE18-4658-8D0F-AC469508DD81}" type="pres">
+      <dgm:prSet presAssocID="{55DB74FC-AA14-484C-90C5-272BF72C7E35}" presName="EmptyPlaceHolder" presStyleCnt="0"/>
+      <dgm:spPr/>
+    </dgm:pt>
+    <dgm:pt modelId="{6AAB63EC-3F70-439E-A8AD-139B441D156F}" type="pres">
+      <dgm:prSet presAssocID="{E93CBD9A-7BE6-4D11-94AD-BFD8DCA9C391}" presName="spaceBetweenRectangles" presStyleCnt="0"/>
+      <dgm:spPr/>
+    </dgm:pt>
     <dgm:pt modelId="{538F7CB4-9A53-484B-81CA-260A79B4F163}" type="pres">
       <dgm:prSet presAssocID="{D50E325C-02F8-4636-83C7-06D5FCD3BA82}" presName="composite" presStyleCnt="0"/>
       <dgm:spPr/>
     </dgm:pt>
     <dgm:pt modelId="{682EA88A-A4E4-4AA7-9FB1-B83F193F2C39}" type="pres">
-      <dgm:prSet presAssocID="{D50E325C-02F8-4636-83C7-06D5FCD3BA82}" presName="ConnectorPoint" presStyleLbl="lnNode1" presStyleIdx="2" presStyleCnt="6"/>
+      <dgm:prSet presAssocID="{D50E325C-02F8-4636-83C7-06D5FCD3BA82}" presName="ConnectorPoint" presStyleLbl="lnNode1" presStyleIdx="3" presStyleCnt="7"/>
       <dgm:spPr>
         <a:solidFill>
           <a:schemeClr val="accent1">
@@ -1601,11 +1794,11 @@
       <dgm:spPr/>
     </dgm:pt>
     <dgm:pt modelId="{4E9D8699-570F-428F-B34E-A8AE18B2A17F}" type="pres">
-      <dgm:prSet presAssocID="{D50E325C-02F8-4636-83C7-06D5FCD3BA82}" presName="DropPin" presStyleLbl="alignNode1" presStyleIdx="4" presStyleCnt="12"/>
+      <dgm:prSet presAssocID="{D50E325C-02F8-4636-83C7-06D5FCD3BA82}" presName="DropPin" presStyleLbl="alignNode1" presStyleIdx="6" presStyleCnt="14"/>
       <dgm:spPr/>
     </dgm:pt>
     <dgm:pt modelId="{64CCA8F3-173A-4D74-B9A2-49BDD6D8183A}" type="pres">
-      <dgm:prSet presAssocID="{D50E325C-02F8-4636-83C7-06D5FCD3BA82}" presName="Ellipse" presStyleLbl="fgAcc1" presStyleIdx="2" presStyleCnt="6"/>
+      <dgm:prSet presAssocID="{D50E325C-02F8-4636-83C7-06D5FCD3BA82}" presName="Ellipse" presStyleLbl="fgAcc1" presStyleIdx="3" presStyleCnt="7"/>
       <dgm:spPr>
         <a:solidFill>
           <a:schemeClr val="accent1">
@@ -1625,7 +1818,7 @@
       </dgm:spPr>
     </dgm:pt>
     <dgm:pt modelId="{00D2B9ED-BE51-47B3-B26C-BA45F9641DBB}" type="pres">
-      <dgm:prSet presAssocID="{D50E325C-02F8-4636-83C7-06D5FCD3BA82}" presName="L2TextContainer" presStyleLbl="revTx" presStyleIdx="2" presStyleCnt="6">
+      <dgm:prSet presAssocID="{D50E325C-02F8-4636-83C7-06D5FCD3BA82}" presName="L2TextContainer" presStyleLbl="revTx" presStyleIdx="3" presStyleCnt="7">
         <dgm:presLayoutVars>
           <dgm:bulletEnabled val="1"/>
         </dgm:presLayoutVars>
@@ -1633,7 +1826,7 @@
       <dgm:spPr/>
     </dgm:pt>
     <dgm:pt modelId="{2664027A-B5AC-41CA-A071-5DF0CF1E8120}" type="pres">
-      <dgm:prSet presAssocID="{D50E325C-02F8-4636-83C7-06D5FCD3BA82}" presName="L1TextContainer" presStyleLbl="alignNode1" presStyleIdx="5" presStyleCnt="12">
+      <dgm:prSet presAssocID="{D50E325C-02F8-4636-83C7-06D5FCD3BA82}" presName="L1TextContainer" presStyleLbl="alignNode1" presStyleIdx="7" presStyleCnt="14">
         <dgm:presLayoutVars>
           <dgm:chMax val="1"/>
           <dgm:chPref val="1"/>
@@ -1643,7 +1836,7 @@
       <dgm:spPr/>
     </dgm:pt>
     <dgm:pt modelId="{6F004247-9FD8-4E6D-9363-DE121E4356A0}" type="pres">
-      <dgm:prSet presAssocID="{D50E325C-02F8-4636-83C7-06D5FCD3BA82}" presName="ConnectLine" presStyleLbl="sibTrans1D1" presStyleIdx="2" presStyleCnt="6"/>
+      <dgm:prSet presAssocID="{D50E325C-02F8-4636-83C7-06D5FCD3BA82}" presName="ConnectLine" presStyleLbl="sibTrans1D1" presStyleIdx="3" presStyleCnt="7"/>
       <dgm:spPr/>
     </dgm:pt>
     <dgm:pt modelId="{5A9AD2D3-337B-4134-B8ED-771B806C587F}" type="pres">
@@ -1659,7 +1852,7 @@
       <dgm:spPr/>
     </dgm:pt>
     <dgm:pt modelId="{410FA866-99AD-47B6-AB30-6629B2F7603F}" type="pres">
-      <dgm:prSet presAssocID="{16BBC706-20BB-4DAB-BE2E-AFABD3EB8DF4}" presName="ConnectorPoint" presStyleLbl="lnNode1" presStyleIdx="3" presStyleCnt="6"/>
+      <dgm:prSet presAssocID="{16BBC706-20BB-4DAB-BE2E-AFABD3EB8DF4}" presName="ConnectorPoint" presStyleLbl="lnNode1" presStyleIdx="4" presStyleCnt="7"/>
       <dgm:spPr>
         <a:solidFill>
           <a:schemeClr val="accent1">
@@ -1689,11 +1882,11 @@
       <dgm:spPr/>
     </dgm:pt>
     <dgm:pt modelId="{1D54DDC9-D893-4C2D-937E-BD8391046565}" type="pres">
-      <dgm:prSet presAssocID="{16BBC706-20BB-4DAB-BE2E-AFABD3EB8DF4}" presName="DropPin" presStyleLbl="alignNode1" presStyleIdx="6" presStyleCnt="12"/>
+      <dgm:prSet presAssocID="{16BBC706-20BB-4DAB-BE2E-AFABD3EB8DF4}" presName="DropPin" presStyleLbl="alignNode1" presStyleIdx="8" presStyleCnt="14"/>
       <dgm:spPr/>
     </dgm:pt>
     <dgm:pt modelId="{A8F6EDE2-EF0C-457E-BC04-95B7917B5FF1}" type="pres">
-      <dgm:prSet presAssocID="{16BBC706-20BB-4DAB-BE2E-AFABD3EB8DF4}" presName="Ellipse" presStyleLbl="fgAcc1" presStyleIdx="3" presStyleCnt="6"/>
+      <dgm:prSet presAssocID="{16BBC706-20BB-4DAB-BE2E-AFABD3EB8DF4}" presName="Ellipse" presStyleLbl="fgAcc1" presStyleIdx="4" presStyleCnt="7"/>
       <dgm:spPr>
         <a:solidFill>
           <a:schemeClr val="accent1">
@@ -1713,7 +1906,7 @@
       </dgm:spPr>
     </dgm:pt>
     <dgm:pt modelId="{229A8B9E-D26E-4B8B-B637-778F404FB5B5}" type="pres">
-      <dgm:prSet presAssocID="{16BBC706-20BB-4DAB-BE2E-AFABD3EB8DF4}" presName="L2TextContainer" presStyleLbl="revTx" presStyleIdx="3" presStyleCnt="6">
+      <dgm:prSet presAssocID="{16BBC706-20BB-4DAB-BE2E-AFABD3EB8DF4}" presName="L2TextContainer" presStyleLbl="revTx" presStyleIdx="4" presStyleCnt="7">
         <dgm:presLayoutVars>
           <dgm:bulletEnabled val="1"/>
         </dgm:presLayoutVars>
@@ -1721,7 +1914,7 @@
       <dgm:spPr/>
     </dgm:pt>
     <dgm:pt modelId="{EE41F65A-AA70-4EE3-81F3-A539EF20984B}" type="pres">
-      <dgm:prSet presAssocID="{16BBC706-20BB-4DAB-BE2E-AFABD3EB8DF4}" presName="L1TextContainer" presStyleLbl="alignNode1" presStyleIdx="7" presStyleCnt="12">
+      <dgm:prSet presAssocID="{16BBC706-20BB-4DAB-BE2E-AFABD3EB8DF4}" presName="L1TextContainer" presStyleLbl="alignNode1" presStyleIdx="9" presStyleCnt="14">
         <dgm:presLayoutVars>
           <dgm:chMax val="1"/>
           <dgm:chPref val="1"/>
@@ -1731,7 +1924,7 @@
       <dgm:spPr/>
     </dgm:pt>
     <dgm:pt modelId="{E28909AF-007C-49D7-8958-97FF1699473D}" type="pres">
-      <dgm:prSet presAssocID="{16BBC706-20BB-4DAB-BE2E-AFABD3EB8DF4}" presName="ConnectLine" presStyleLbl="sibTrans1D1" presStyleIdx="3" presStyleCnt="6"/>
+      <dgm:prSet presAssocID="{16BBC706-20BB-4DAB-BE2E-AFABD3EB8DF4}" presName="ConnectLine" presStyleLbl="sibTrans1D1" presStyleIdx="4" presStyleCnt="7"/>
       <dgm:spPr/>
     </dgm:pt>
     <dgm:pt modelId="{6C0C9696-FE62-48F7-8988-6F70C68CBD83}" type="pres">
@@ -1747,7 +1940,7 @@
       <dgm:spPr/>
     </dgm:pt>
     <dgm:pt modelId="{D1F0411E-85F0-49A3-90A8-C760162A06F7}" type="pres">
-      <dgm:prSet presAssocID="{D58E6C69-1D05-44C2-9491-5FDB663AAFB1}" presName="ConnectorPoint" presStyleLbl="lnNode1" presStyleIdx="4" presStyleCnt="6"/>
+      <dgm:prSet presAssocID="{D58E6C69-1D05-44C2-9491-5FDB663AAFB1}" presName="ConnectorPoint" presStyleLbl="lnNode1" presStyleIdx="5" presStyleCnt="7"/>
       <dgm:spPr>
         <a:solidFill>
           <a:schemeClr val="accent1">
@@ -1777,11 +1970,11 @@
       <dgm:spPr/>
     </dgm:pt>
     <dgm:pt modelId="{061DA4A7-7DD3-47A6-8F75-591FD3C5F66E}" type="pres">
-      <dgm:prSet presAssocID="{D58E6C69-1D05-44C2-9491-5FDB663AAFB1}" presName="DropPin" presStyleLbl="alignNode1" presStyleIdx="8" presStyleCnt="12"/>
+      <dgm:prSet presAssocID="{D58E6C69-1D05-44C2-9491-5FDB663AAFB1}" presName="DropPin" presStyleLbl="alignNode1" presStyleIdx="10" presStyleCnt="14"/>
       <dgm:spPr/>
     </dgm:pt>
     <dgm:pt modelId="{0E07606D-90D6-4C46-9C6F-D1FA7A46AD31}" type="pres">
-      <dgm:prSet presAssocID="{D58E6C69-1D05-44C2-9491-5FDB663AAFB1}" presName="Ellipse" presStyleLbl="fgAcc1" presStyleIdx="4" presStyleCnt="6"/>
+      <dgm:prSet presAssocID="{D58E6C69-1D05-44C2-9491-5FDB663AAFB1}" presName="Ellipse" presStyleLbl="fgAcc1" presStyleIdx="5" presStyleCnt="7"/>
       <dgm:spPr>
         <a:solidFill>
           <a:schemeClr val="accent1">
@@ -1801,7 +1994,7 @@
       </dgm:spPr>
     </dgm:pt>
     <dgm:pt modelId="{A8C61B89-04C1-40B8-A753-92BDABE39300}" type="pres">
-      <dgm:prSet presAssocID="{D58E6C69-1D05-44C2-9491-5FDB663AAFB1}" presName="L2TextContainer" presStyleLbl="revTx" presStyleIdx="4" presStyleCnt="6">
+      <dgm:prSet presAssocID="{D58E6C69-1D05-44C2-9491-5FDB663AAFB1}" presName="L2TextContainer" presStyleLbl="revTx" presStyleIdx="5" presStyleCnt="7">
         <dgm:presLayoutVars>
           <dgm:bulletEnabled val="1"/>
         </dgm:presLayoutVars>
@@ -1809,7 +2002,7 @@
       <dgm:spPr/>
     </dgm:pt>
     <dgm:pt modelId="{F7F215AA-1548-4946-9818-24CE434B0257}" type="pres">
-      <dgm:prSet presAssocID="{D58E6C69-1D05-44C2-9491-5FDB663AAFB1}" presName="L1TextContainer" presStyleLbl="alignNode1" presStyleIdx="9" presStyleCnt="12">
+      <dgm:prSet presAssocID="{D58E6C69-1D05-44C2-9491-5FDB663AAFB1}" presName="L1TextContainer" presStyleLbl="alignNode1" presStyleIdx="11" presStyleCnt="14">
         <dgm:presLayoutVars>
           <dgm:chMax val="1"/>
           <dgm:chPref val="1"/>
@@ -1819,7 +2012,7 @@
       <dgm:spPr/>
     </dgm:pt>
     <dgm:pt modelId="{A657FCB3-50B0-4F61-A00C-56D9B387AFBF}" type="pres">
-      <dgm:prSet presAssocID="{D58E6C69-1D05-44C2-9491-5FDB663AAFB1}" presName="ConnectLine" presStyleLbl="sibTrans1D1" presStyleIdx="4" presStyleCnt="6"/>
+      <dgm:prSet presAssocID="{D58E6C69-1D05-44C2-9491-5FDB663AAFB1}" presName="ConnectLine" presStyleLbl="sibTrans1D1" presStyleIdx="5" presStyleCnt="7"/>
       <dgm:spPr/>
     </dgm:pt>
     <dgm:pt modelId="{7D6140CA-EF57-4603-ADAF-5E5FB81F7207}" type="pres">
@@ -1835,7 +2028,7 @@
       <dgm:spPr/>
     </dgm:pt>
     <dgm:pt modelId="{5657EE69-424A-4CD8-B5EE-7DBEE83B0DC9}" type="pres">
-      <dgm:prSet presAssocID="{2520C895-A69C-4E1D-833E-CFCF8D045592}" presName="ConnectorPoint" presStyleLbl="lnNode1" presStyleIdx="5" presStyleCnt="6"/>
+      <dgm:prSet presAssocID="{2520C895-A69C-4E1D-833E-CFCF8D045592}" presName="ConnectorPoint" presStyleLbl="lnNode1" presStyleIdx="6" presStyleCnt="7"/>
       <dgm:spPr>
         <a:solidFill>
           <a:schemeClr val="accent1">
@@ -1865,11 +2058,11 @@
       <dgm:spPr/>
     </dgm:pt>
     <dgm:pt modelId="{72EA4842-5C5D-4BE9-9AD2-6FAF498B2540}" type="pres">
-      <dgm:prSet presAssocID="{2520C895-A69C-4E1D-833E-CFCF8D045592}" presName="DropPin" presStyleLbl="alignNode1" presStyleIdx="10" presStyleCnt="12"/>
+      <dgm:prSet presAssocID="{2520C895-A69C-4E1D-833E-CFCF8D045592}" presName="DropPin" presStyleLbl="alignNode1" presStyleIdx="12" presStyleCnt="14"/>
       <dgm:spPr/>
     </dgm:pt>
     <dgm:pt modelId="{703E798C-4E72-4A6C-AD2F-3EEC1D89A51B}" type="pres">
-      <dgm:prSet presAssocID="{2520C895-A69C-4E1D-833E-CFCF8D045592}" presName="Ellipse" presStyleLbl="fgAcc1" presStyleIdx="5" presStyleCnt="6"/>
+      <dgm:prSet presAssocID="{2520C895-A69C-4E1D-833E-CFCF8D045592}" presName="Ellipse" presStyleLbl="fgAcc1" presStyleIdx="6" presStyleCnt="7"/>
       <dgm:spPr>
         <a:solidFill>
           <a:schemeClr val="accent1">
@@ -1889,7 +2082,7 @@
       </dgm:spPr>
     </dgm:pt>
     <dgm:pt modelId="{7B4887C6-E1B4-4412-86BB-F455A05D8A46}" type="pres">
-      <dgm:prSet presAssocID="{2520C895-A69C-4E1D-833E-CFCF8D045592}" presName="L2TextContainer" presStyleLbl="revTx" presStyleIdx="5" presStyleCnt="6">
+      <dgm:prSet presAssocID="{2520C895-A69C-4E1D-833E-CFCF8D045592}" presName="L2TextContainer" presStyleLbl="revTx" presStyleIdx="6" presStyleCnt="7">
         <dgm:presLayoutVars>
           <dgm:bulletEnabled val="1"/>
         </dgm:presLayoutVars>
@@ -1897,7 +2090,7 @@
       <dgm:spPr/>
     </dgm:pt>
     <dgm:pt modelId="{415234FF-8B2B-48A0-B0A8-E0517D1909DD}" type="pres">
-      <dgm:prSet presAssocID="{2520C895-A69C-4E1D-833E-CFCF8D045592}" presName="L1TextContainer" presStyleLbl="alignNode1" presStyleIdx="11" presStyleCnt="12">
+      <dgm:prSet presAssocID="{2520C895-A69C-4E1D-833E-CFCF8D045592}" presName="L1TextContainer" presStyleLbl="alignNode1" presStyleIdx="13" presStyleCnt="14">
         <dgm:presLayoutVars>
           <dgm:chMax val="1"/>
           <dgm:chPref val="1"/>
@@ -1907,7 +2100,7 @@
       <dgm:spPr/>
     </dgm:pt>
     <dgm:pt modelId="{573D2282-3279-4BF1-B7CA-BAB23F064BDC}" type="pres">
-      <dgm:prSet presAssocID="{2520C895-A69C-4E1D-833E-CFCF8D045592}" presName="ConnectLine" presStyleLbl="sibTrans1D1" presStyleIdx="5" presStyleCnt="6"/>
+      <dgm:prSet presAssocID="{2520C895-A69C-4E1D-833E-CFCF8D045592}" presName="ConnectLine" presStyleLbl="sibTrans1D1" presStyleIdx="6" presStyleCnt="7"/>
       <dgm:spPr/>
     </dgm:pt>
     <dgm:pt modelId="{4E1E2890-8665-4899-9FC8-69300C2D910D}" type="pres">
@@ -1916,92 +2109,106 @@
     </dgm:pt>
   </dgm:ptLst>
   <dgm:cxnLst>
-    <dgm:cxn modelId="{D562AD03-6565-40F6-8AF1-6711B7C2F39E}" type="presOf" srcId="{D50E325C-02F8-4636-83C7-06D5FCD3BA82}" destId="{2664027A-B5AC-41CA-A071-5DF0CF1E8120}" srcOrd="0" destOrd="0" presId="urn:microsoft.com/office/officeart/2024/3/layout/SimpleTimelineDefaultVariant"/>
-    <dgm:cxn modelId="{B46E2409-4F36-423D-80F6-5735CFFD98C3}" type="presOf" srcId="{CF314EE2-D6D7-4536-A6FD-41DF85B6060B}" destId="{01E41ACE-E33B-41B9-A714-73522D3F7C76}" srcOrd="0" destOrd="0" presId="urn:microsoft.com/office/officeart/2024/3/layout/SimpleTimelineDefaultVariant"/>
-    <dgm:cxn modelId="{5256960A-E2B8-4EA0-9FD8-757FABFF6D21}" srcId="{2430CC21-05DE-42C5-993E-E946140B4D86}" destId="{D58E6C69-1D05-44C2-9491-5FDB663AAFB1}" srcOrd="4" destOrd="0" parTransId="{5A34F788-8BB8-41E7-B4B9-5FA4F647078C}" sibTransId="{7B85E398-94A7-4AB5-8CDF-7F81E2F539B1}"/>
+    <dgm:cxn modelId="{11AFC101-97D7-486A-84C9-801A1F85E01C}" type="presOf" srcId="{2520C895-A69C-4E1D-833E-CFCF8D045592}" destId="{415234FF-8B2B-48A0-B0A8-E0517D1909DD}" srcOrd="0" destOrd="0" presId="urn:microsoft.com/office/officeart/2024/3/layout/SimpleTimelineDefaultVariant"/>
+    <dgm:cxn modelId="{AB637A08-8E4B-45EB-953F-C80BBB60EAF4}" type="presOf" srcId="{DB0F8EA1-4EC9-4B36-B3A0-726A64C3981F}" destId="{89EF5014-7ECE-4300-A882-B69FFA73745D}" srcOrd="0" destOrd="0" presId="urn:microsoft.com/office/officeart/2024/3/layout/SimpleTimelineDefaultVariant"/>
+    <dgm:cxn modelId="{5256960A-E2B8-4EA0-9FD8-757FABFF6D21}" srcId="{2430CC21-05DE-42C5-993E-E946140B4D86}" destId="{D58E6C69-1D05-44C2-9491-5FDB663AAFB1}" srcOrd="5" destOrd="0" parTransId="{5A34F788-8BB8-41E7-B4B9-5FA4F647078C}" sibTransId="{7B85E398-94A7-4AB5-8CDF-7F81E2F539B1}"/>
     <dgm:cxn modelId="{A0200E12-295E-4F66-BED2-CEF30ADAA122}" srcId="{2520C895-A69C-4E1D-833E-CFCF8D045592}" destId="{730198F8-8277-4469-A2E6-D7B60D4E0025}" srcOrd="0" destOrd="0" parTransId="{CFB92EED-D2A6-4767-B7AA-6133823B2886}" sibTransId="{523C5D6A-73AB-4D5D-B396-58B4DA401B5B}"/>
+    <dgm:cxn modelId="{5210F916-EF5E-42EA-A13D-D0DE27D6D1D3}" type="presOf" srcId="{D58E6C69-1D05-44C2-9491-5FDB663AAFB1}" destId="{F7F215AA-1548-4946-9818-24CE434B0257}" srcOrd="0" destOrd="0" presId="urn:microsoft.com/office/officeart/2024/3/layout/SimpleTimelineDefaultVariant"/>
     <dgm:cxn modelId="{FF84021C-D09A-4251-87DC-BF866E852213}" srcId="{CF314EE2-D6D7-4536-A6FD-41DF85B6060B}" destId="{9F792233-6D2D-4F91-A8EB-9D8F22D4829D}" srcOrd="0" destOrd="0" parTransId="{36D0B96F-9F6E-4190-9C30-8339340786C1}" sibTransId="{B8159D87-D080-4B9F-BD24-7251D51546B6}"/>
-    <dgm:cxn modelId="{98348C1F-A512-4A4D-A0C8-F973D574AB76}" type="presOf" srcId="{16BBC706-20BB-4DAB-BE2E-AFABD3EB8DF4}" destId="{EE41F65A-AA70-4EE3-81F3-A539EF20984B}" srcOrd="0" destOrd="0" presId="urn:microsoft.com/office/officeart/2024/3/layout/SimpleTimelineDefaultVariant"/>
+    <dgm:cxn modelId="{DC3BFC2D-9791-4016-B391-2D46620603AD}" type="presOf" srcId="{15D026C8-3FA6-448A-A3BC-AAA5CEA229FC}" destId="{0C33ADDC-85D4-4DBF-83AE-CB3AB9747E6D}" srcOrd="0" destOrd="0" presId="urn:microsoft.com/office/officeart/2024/3/layout/SimpleTimelineDefaultVariant"/>
     <dgm:cxn modelId="{3467A331-0E39-4B91-A698-B6CF31926ABD}" srcId="{2430CC21-05DE-42C5-993E-E946140B4D86}" destId="{DB0F8EA1-4EC9-4B36-B3A0-726A64C3981F}" srcOrd="1" destOrd="0" parTransId="{3D13D3C0-A39B-408B-A8DC-477DE50366DC}" sibTransId="{08BC88D8-82C0-4A30-9ABA-A0DE6ABB8151}"/>
-    <dgm:cxn modelId="{AD053F3E-223F-47FA-BF3D-825CF9478A38}" type="presOf" srcId="{9F792233-6D2D-4F91-A8EB-9D8F22D4829D}" destId="{31877334-3A87-4D72-A1B1-F99AFF9D710D}" srcOrd="0" destOrd="0" presId="urn:microsoft.com/office/officeart/2024/3/layout/SimpleTimelineDefaultVariant"/>
     <dgm:cxn modelId="{7C55105F-60DE-48A6-9748-219EB1406961}" srcId="{D58E6C69-1D05-44C2-9491-5FDB663AAFB1}" destId="{C65E3B61-EBF5-4BE9-9C69-BC45396A57AD}" srcOrd="0" destOrd="0" parTransId="{4C424451-E7F8-4165-AB39-A4B9981ECD8D}" sibTransId="{91360B95-3742-41EC-B2BD-D9DE7C6F2A81}"/>
     <dgm:cxn modelId="{4E621261-5009-4A18-83C9-97E356045B17}" type="presOf" srcId="{2430CC21-05DE-42C5-993E-E946140B4D86}" destId="{9AE89FB1-F474-491F-AB27-A0F134775DF5}" srcOrd="0" destOrd="0" presId="urn:microsoft.com/office/officeart/2024/3/layout/SimpleTimelineDefaultVariant"/>
-    <dgm:cxn modelId="{1CB01F46-DE10-431C-8EF4-C40D18F95DD7}" type="presOf" srcId="{925E6D1D-D87D-40EB-9615-95968B35A91B}" destId="{00D2B9ED-BE51-47B3-B26C-BA45F9641DBB}" srcOrd="0" destOrd="0" presId="urn:microsoft.com/office/officeart/2024/3/layout/SimpleTimelineDefaultVariant"/>
-    <dgm:cxn modelId="{C3F4C46E-6D33-46B9-9250-E8CCB54C1832}" type="presOf" srcId="{DB0F8EA1-4EC9-4B36-B3A0-726A64C3981F}" destId="{89EF5014-7ECE-4300-A882-B69FFA73745D}" srcOrd="0" destOrd="0" presId="urn:microsoft.com/office/officeart/2024/3/layout/SimpleTimelineDefaultVariant"/>
-    <dgm:cxn modelId="{E748A556-A192-4F02-BDCB-988F4CD2BF43}" type="presOf" srcId="{C9334617-D8FF-4772-940C-26C317DD1123}" destId="{229A8B9E-D26E-4B8B-B637-778F404FB5B5}" srcOrd="0" destOrd="0" presId="urn:microsoft.com/office/officeart/2024/3/layout/SimpleTimelineDefaultVariant"/>
-    <dgm:cxn modelId="{5B03E37C-4FA6-4FE3-9CC9-C9BE34E43339}" srcId="{DB0F8EA1-4EC9-4B36-B3A0-726A64C3981F}" destId="{15D026C8-3FA6-448A-A3BC-AAA5CEA229FC}" srcOrd="0" destOrd="0" parTransId="{57134387-37E6-4073-B620-EB2BC76CDF46}" sibTransId="{E937AFED-88C7-4905-9A04-A9EE8FF53C44}"/>
+    <dgm:cxn modelId="{27676142-C033-41B4-943F-A9B0027B5D02}" type="presOf" srcId="{16BBC706-20BB-4DAB-BE2E-AFABD3EB8DF4}" destId="{EE41F65A-AA70-4EE3-81F3-A539EF20984B}" srcOrd="0" destOrd="0" presId="urn:microsoft.com/office/officeart/2024/3/layout/SimpleTimelineDefaultVariant"/>
+    <dgm:cxn modelId="{39F2396D-8FFD-4C51-BF9A-7655D6AA97C8}" type="presOf" srcId="{C65E3B61-EBF5-4BE9-9C69-BC45396A57AD}" destId="{A8C61B89-04C1-40B8-A753-92BDABE39300}" srcOrd="0" destOrd="0" presId="urn:microsoft.com/office/officeart/2024/3/layout/SimpleTimelineDefaultVariant"/>
+    <dgm:cxn modelId="{0E6FF86F-2A97-4FF9-9A02-7510A874A52F}" type="presOf" srcId="{C9334617-D8FF-4772-940C-26C317DD1123}" destId="{229A8B9E-D26E-4B8B-B637-778F404FB5B5}" srcOrd="0" destOrd="0" presId="urn:microsoft.com/office/officeart/2024/3/layout/SimpleTimelineDefaultVariant"/>
+    <dgm:cxn modelId="{82B93D59-17F9-4A62-9E1A-056F88F7EAE4}" type="presOf" srcId="{55DB74FC-AA14-484C-90C5-272BF72C7E35}" destId="{F60B4A9E-2A40-44D1-A1A8-F4A47B5C2960}" srcOrd="0" destOrd="0" presId="urn:microsoft.com/office/officeart/2024/3/layout/SimpleTimelineDefaultVariant"/>
+    <dgm:cxn modelId="{5B03E37C-4FA6-4FE3-9CC9-C9BE34E43339}" srcId="{55DB74FC-AA14-484C-90C5-272BF72C7E35}" destId="{15D026C8-3FA6-448A-A3BC-AAA5CEA229FC}" srcOrd="0" destOrd="0" parTransId="{57134387-37E6-4073-B620-EB2BC76CDF46}" sibTransId="{E937AFED-88C7-4905-9A04-A9EE8FF53C44}"/>
     <dgm:cxn modelId="{141C768B-5B29-4514-ADB9-DA4B47B9BB64}" srcId="{2430CC21-05DE-42C5-993E-E946140B4D86}" destId="{CF314EE2-D6D7-4536-A6FD-41DF85B6060B}" srcOrd="0" destOrd="0" parTransId="{5BED5465-B695-404C-AE81-2275201F5711}" sibTransId="{D0172F94-2558-45FD-BF33-041BFEBCEA23}"/>
-    <dgm:cxn modelId="{C634F497-3328-45C5-A0A7-8982C079FFE5}" type="presOf" srcId="{15D026C8-3FA6-448A-A3BC-AAA5CEA229FC}" destId="{443870C5-2799-47B5-AA6B-A0C45107D3FC}" srcOrd="0" destOrd="0" presId="urn:microsoft.com/office/officeart/2024/3/layout/SimpleTimelineDefaultVariant"/>
+    <dgm:cxn modelId="{01786C96-8A2E-4BF3-BEC2-E30FA4ACE245}" srcId="{DB0F8EA1-4EC9-4B36-B3A0-726A64C3981F}" destId="{5419EDF0-37A9-436C-B8B3-9B4FEA7E70F4}" srcOrd="0" destOrd="0" parTransId="{83343AD1-A745-45E3-BDD5-EFBC3C62047F}" sibTransId="{D4F9ACE3-DCE1-4817-BAB7-F6E97CA81E9F}"/>
     <dgm:cxn modelId="{9A7892A0-CAA6-4075-A2BC-E6CDABFCB58C}" srcId="{16BBC706-20BB-4DAB-BE2E-AFABD3EB8DF4}" destId="{C9334617-D8FF-4772-940C-26C317DD1123}" srcOrd="0" destOrd="0" parTransId="{77C439E6-73CD-4F75-87DB-459EDD8FCC6B}" sibTransId="{B6087F6D-C261-4E7A-9D17-3261F7DAB742}"/>
-    <dgm:cxn modelId="{A18F02A4-9CFB-46A9-9689-45F9B518FFD8}" srcId="{2430CC21-05DE-42C5-993E-E946140B4D86}" destId="{16BBC706-20BB-4DAB-BE2E-AFABD3EB8DF4}" srcOrd="3" destOrd="0" parTransId="{FFC39569-AC40-4992-905B-F5979F552B76}" sibTransId="{2BE8C82F-3D4F-4067-BF75-088338C4E144}"/>
-    <dgm:cxn modelId="{EC4DD3B4-3385-4214-BE01-3B0C3017D2DA}" type="presOf" srcId="{D58E6C69-1D05-44C2-9491-5FDB663AAFB1}" destId="{F7F215AA-1548-4946-9818-24CE434B0257}" srcOrd="0" destOrd="0" presId="urn:microsoft.com/office/officeart/2024/3/layout/SimpleTimelineDefaultVariant"/>
-    <dgm:cxn modelId="{AF0605B5-6EC5-474B-AF1B-83308F626370}" srcId="{2430CC21-05DE-42C5-993E-E946140B4D86}" destId="{2520C895-A69C-4E1D-833E-CFCF8D045592}" srcOrd="5" destOrd="0" parTransId="{94832D78-9833-41A4-81C5-EF626380929C}" sibTransId="{CEAFE364-1135-476B-A766-6591619D08D7}"/>
-    <dgm:cxn modelId="{23B99BBD-B967-4475-B841-59E3F53E0D76}" type="presOf" srcId="{C65E3B61-EBF5-4BE9-9C69-BC45396A57AD}" destId="{A8C61B89-04C1-40B8-A753-92BDABE39300}" srcOrd="0" destOrd="0" presId="urn:microsoft.com/office/officeart/2024/3/layout/SimpleTimelineDefaultVariant"/>
-    <dgm:cxn modelId="{6ADE62D9-D3A1-41C4-887F-2D09D6882601}" srcId="{2430CC21-05DE-42C5-993E-E946140B4D86}" destId="{D50E325C-02F8-4636-83C7-06D5FCD3BA82}" srcOrd="2" destOrd="0" parTransId="{B10AAB54-8404-4113-AEA9-476DC7B36F38}" sibTransId="{235F5447-7591-489B-8E03-171373207EFC}"/>
-    <dgm:cxn modelId="{3371C5DF-209D-4137-970C-269B3B2AEF52}" type="presOf" srcId="{2520C895-A69C-4E1D-833E-CFCF8D045592}" destId="{415234FF-8B2B-48A0-B0A8-E0517D1909DD}" srcOrd="0" destOrd="0" presId="urn:microsoft.com/office/officeart/2024/3/layout/SimpleTimelineDefaultVariant"/>
-    <dgm:cxn modelId="{96B42CEC-8A2B-40CE-B8F3-DB09FD0C87CD}" type="presOf" srcId="{730198F8-8277-4469-A2E6-D7B60D4E0025}" destId="{7B4887C6-E1B4-4412-86BB-F455A05D8A46}" srcOrd="0" destOrd="0" presId="urn:microsoft.com/office/officeart/2024/3/layout/SimpleTimelineDefaultVariant"/>
+    <dgm:cxn modelId="{A18F02A4-9CFB-46A9-9689-45F9B518FFD8}" srcId="{2430CC21-05DE-42C5-993E-E946140B4D86}" destId="{16BBC706-20BB-4DAB-BE2E-AFABD3EB8DF4}" srcOrd="4" destOrd="0" parTransId="{FFC39569-AC40-4992-905B-F5979F552B76}" sibTransId="{2BE8C82F-3D4F-4067-BF75-088338C4E144}"/>
+    <dgm:cxn modelId="{48490DA6-498E-4365-AEBE-613B553408D7}" srcId="{2430CC21-05DE-42C5-993E-E946140B4D86}" destId="{55DB74FC-AA14-484C-90C5-272BF72C7E35}" srcOrd="2" destOrd="0" parTransId="{D6AED8D8-0009-4B66-8C28-D0634FC48861}" sibTransId="{E93CBD9A-7BE6-4D11-94AD-BFD8DCA9C391}"/>
+    <dgm:cxn modelId="{AF0605B5-6EC5-474B-AF1B-83308F626370}" srcId="{2430CC21-05DE-42C5-993E-E946140B4D86}" destId="{2520C895-A69C-4E1D-833E-CFCF8D045592}" srcOrd="6" destOrd="0" parTransId="{94832D78-9833-41A4-81C5-EF626380929C}" sibTransId="{CEAFE364-1135-476B-A766-6591619D08D7}"/>
+    <dgm:cxn modelId="{0C5265BD-48F7-49E7-ADF9-E034AF849A28}" type="presOf" srcId="{925E6D1D-D87D-40EB-9615-95968B35A91B}" destId="{00D2B9ED-BE51-47B3-B26C-BA45F9641DBB}" srcOrd="0" destOrd="0" presId="urn:microsoft.com/office/officeart/2024/3/layout/SimpleTimelineDefaultVariant"/>
+    <dgm:cxn modelId="{A8C46DC0-76E4-4DB0-9287-276957B5E0BE}" type="presOf" srcId="{9F792233-6D2D-4F91-A8EB-9D8F22D4829D}" destId="{31877334-3A87-4D72-A1B1-F99AFF9D710D}" srcOrd="0" destOrd="0" presId="urn:microsoft.com/office/officeart/2024/3/layout/SimpleTimelineDefaultVariant"/>
+    <dgm:cxn modelId="{EA724DD3-1EAD-46D4-A4BE-CE281A5BCEF7}" type="presOf" srcId="{D50E325C-02F8-4636-83C7-06D5FCD3BA82}" destId="{2664027A-B5AC-41CA-A071-5DF0CF1E8120}" srcOrd="0" destOrd="0" presId="urn:microsoft.com/office/officeart/2024/3/layout/SimpleTimelineDefaultVariant"/>
+    <dgm:cxn modelId="{E336CCD7-75F9-45AA-A74A-E88B8D7DA510}" type="presOf" srcId="{730198F8-8277-4469-A2E6-D7B60D4E0025}" destId="{7B4887C6-E1B4-4412-86BB-F455A05D8A46}" srcOrd="0" destOrd="0" presId="urn:microsoft.com/office/officeart/2024/3/layout/SimpleTimelineDefaultVariant"/>
+    <dgm:cxn modelId="{6ADE62D9-D3A1-41C4-887F-2D09D6882601}" srcId="{2430CC21-05DE-42C5-993E-E946140B4D86}" destId="{D50E325C-02F8-4636-83C7-06D5FCD3BA82}" srcOrd="3" destOrd="0" parTransId="{B10AAB54-8404-4113-AEA9-476DC7B36F38}" sibTransId="{235F5447-7591-489B-8E03-171373207EFC}"/>
+    <dgm:cxn modelId="{53BFA7DF-E4DD-4E81-B8A0-8E3643E977FE}" type="presOf" srcId="{5419EDF0-37A9-436C-B8B3-9B4FEA7E70F4}" destId="{443870C5-2799-47B5-AA6B-A0C45107D3FC}" srcOrd="0" destOrd="0" presId="urn:microsoft.com/office/officeart/2024/3/layout/SimpleTimelineDefaultVariant"/>
     <dgm:cxn modelId="{1B79ADF3-BF05-49D6-A5B0-DDCC4D8861B9}" srcId="{D50E325C-02F8-4636-83C7-06D5FCD3BA82}" destId="{925E6D1D-D87D-40EB-9615-95968B35A91B}" srcOrd="0" destOrd="0" parTransId="{0F17F012-6AC8-4096-A067-F8D7A11F78A1}" sibTransId="{947CDB28-0A82-445F-95C7-C684DA134CE6}"/>
-    <dgm:cxn modelId="{9E74B8B3-3E47-41DA-AFBE-037CF1A1F7E0}" type="presParOf" srcId="{9AE89FB1-F474-491F-AB27-A0F134775DF5}" destId="{B7BF8D1E-0607-4B5F-981C-154E326D1064}" srcOrd="0" destOrd="0" presId="urn:microsoft.com/office/officeart/2024/3/layout/SimpleTimelineDefaultVariant"/>
-    <dgm:cxn modelId="{E5D4830D-9283-4B4A-B153-3AD0EC92935D}" type="presParOf" srcId="{9AE89FB1-F474-491F-AB27-A0F134775DF5}" destId="{A7AE47DD-8DEC-4B56-9367-A4C3486B2D96}" srcOrd="1" destOrd="0" presId="urn:microsoft.com/office/officeart/2024/3/layout/SimpleTimelineDefaultVariant"/>
-    <dgm:cxn modelId="{92A60B34-44B5-4241-A246-9B8AE9EEC888}" type="presParOf" srcId="{A7AE47DD-8DEC-4B56-9367-A4C3486B2D96}" destId="{53FB245B-549F-41A8-85A7-8DC9298ABFD7}" srcOrd="0" destOrd="0" presId="urn:microsoft.com/office/officeart/2024/3/layout/SimpleTimelineDefaultVariant"/>
-    <dgm:cxn modelId="{AE077938-6A5A-4F92-A7E5-E945C149E525}" type="presParOf" srcId="{53FB245B-549F-41A8-85A7-8DC9298ABFD7}" destId="{34DD218C-FBA4-4914-8E86-E286CBBF679B}" srcOrd="0" destOrd="0" presId="urn:microsoft.com/office/officeart/2024/3/layout/SimpleTimelineDefaultVariant"/>
-    <dgm:cxn modelId="{92746E15-DB21-4789-83B4-6A88C3E6B7F0}" type="presParOf" srcId="{53FB245B-549F-41A8-85A7-8DC9298ABFD7}" destId="{D7F5E375-D0CA-42FC-835A-31381C5E5D37}" srcOrd="1" destOrd="0" presId="urn:microsoft.com/office/officeart/2024/3/layout/SimpleTimelineDefaultVariant"/>
-    <dgm:cxn modelId="{848C9B4D-DFD7-4811-89F5-7AAEC7EC892B}" type="presParOf" srcId="{D7F5E375-D0CA-42FC-835A-31381C5E5D37}" destId="{90BFAD0B-06DA-4B4F-B83D-5C02B8A89EC4}" srcOrd="0" destOrd="0" presId="urn:microsoft.com/office/officeart/2024/3/layout/SimpleTimelineDefaultVariant"/>
-    <dgm:cxn modelId="{0EEAA99C-1CFA-4657-91DD-855054B11F6F}" type="presParOf" srcId="{D7F5E375-D0CA-42FC-835A-31381C5E5D37}" destId="{3941855B-9F45-4A82-956B-02684A432AA5}" srcOrd="1" destOrd="0" presId="urn:microsoft.com/office/officeart/2024/3/layout/SimpleTimelineDefaultVariant"/>
-    <dgm:cxn modelId="{EF37EFBC-6C3F-447B-A61C-84F54894FA2D}" type="presParOf" srcId="{53FB245B-549F-41A8-85A7-8DC9298ABFD7}" destId="{31877334-3A87-4D72-A1B1-F99AFF9D710D}" srcOrd="2" destOrd="0" presId="urn:microsoft.com/office/officeart/2024/3/layout/SimpleTimelineDefaultVariant"/>
-    <dgm:cxn modelId="{BDE6DD21-6621-4E0E-8697-34D535955A74}" type="presParOf" srcId="{53FB245B-549F-41A8-85A7-8DC9298ABFD7}" destId="{01E41ACE-E33B-41B9-A714-73522D3F7C76}" srcOrd="3" destOrd="0" presId="urn:microsoft.com/office/officeart/2024/3/layout/SimpleTimelineDefaultVariant"/>
-    <dgm:cxn modelId="{3E0A0140-AC71-4DE2-A53D-B45BE5077CC6}" type="presParOf" srcId="{53FB245B-549F-41A8-85A7-8DC9298ABFD7}" destId="{CEE8CE24-AD73-4777-BAB3-4A5D9CE74308}" srcOrd="4" destOrd="0" presId="urn:microsoft.com/office/officeart/2024/3/layout/SimpleTimelineDefaultVariant"/>
-    <dgm:cxn modelId="{2636BBA0-AD18-49CB-B8F2-0785A89834A3}" type="presParOf" srcId="{53FB245B-549F-41A8-85A7-8DC9298ABFD7}" destId="{CA0DAB95-CF81-4C72-99EC-F6A08D694850}" srcOrd="5" destOrd="0" presId="urn:microsoft.com/office/officeart/2024/3/layout/SimpleTimelineDefaultVariant"/>
-    <dgm:cxn modelId="{0F157F03-CAB3-4737-AA26-56463C32AFA9}" type="presParOf" srcId="{A7AE47DD-8DEC-4B56-9367-A4C3486B2D96}" destId="{5B1444F8-B111-4850-AE5F-D928CB18CD7B}" srcOrd="1" destOrd="0" presId="urn:microsoft.com/office/officeart/2024/3/layout/SimpleTimelineDefaultVariant"/>
-    <dgm:cxn modelId="{1A6C122C-F285-40EE-B923-50F57B59A95A}" type="presParOf" srcId="{A7AE47DD-8DEC-4B56-9367-A4C3486B2D96}" destId="{3E821FC4-A874-450B-8482-9337AC1C1E0B}" srcOrd="2" destOrd="0" presId="urn:microsoft.com/office/officeart/2024/3/layout/SimpleTimelineDefaultVariant"/>
-    <dgm:cxn modelId="{4E92F351-1859-4ECE-8F9D-0C243F36F33B}" type="presParOf" srcId="{3E821FC4-A874-450B-8482-9337AC1C1E0B}" destId="{0D3203CA-3A44-4E67-9918-35447FA83302}" srcOrd="0" destOrd="0" presId="urn:microsoft.com/office/officeart/2024/3/layout/SimpleTimelineDefaultVariant"/>
-    <dgm:cxn modelId="{F4AED0DC-5834-4433-B25A-3CEA321B20EF}" type="presParOf" srcId="{3E821FC4-A874-450B-8482-9337AC1C1E0B}" destId="{167C0091-4211-46CD-8319-88B0084C9D44}" srcOrd="1" destOrd="0" presId="urn:microsoft.com/office/officeart/2024/3/layout/SimpleTimelineDefaultVariant"/>
-    <dgm:cxn modelId="{720EF8D9-14D6-4B51-A2CC-DDA51E9C880A}" type="presParOf" srcId="{167C0091-4211-46CD-8319-88B0084C9D44}" destId="{DC0398C9-F266-4E41-85EE-CAB679514169}" srcOrd="0" destOrd="0" presId="urn:microsoft.com/office/officeart/2024/3/layout/SimpleTimelineDefaultVariant"/>
-    <dgm:cxn modelId="{16387726-280B-44BC-AF61-2598E31649D6}" type="presParOf" srcId="{167C0091-4211-46CD-8319-88B0084C9D44}" destId="{591D0C9E-F3BD-4ACE-A927-797BE3DA39DF}" srcOrd="1" destOrd="0" presId="urn:microsoft.com/office/officeart/2024/3/layout/SimpleTimelineDefaultVariant"/>
-    <dgm:cxn modelId="{9695F868-D0DE-49F8-AC05-DD8F526209A0}" type="presParOf" srcId="{3E821FC4-A874-450B-8482-9337AC1C1E0B}" destId="{443870C5-2799-47B5-AA6B-A0C45107D3FC}" srcOrd="2" destOrd="0" presId="urn:microsoft.com/office/officeart/2024/3/layout/SimpleTimelineDefaultVariant"/>
-    <dgm:cxn modelId="{9F0B5021-2B2F-469A-8B6A-75EE0E3219EE}" type="presParOf" srcId="{3E821FC4-A874-450B-8482-9337AC1C1E0B}" destId="{89EF5014-7ECE-4300-A882-B69FFA73745D}" srcOrd="3" destOrd="0" presId="urn:microsoft.com/office/officeart/2024/3/layout/SimpleTimelineDefaultVariant"/>
-    <dgm:cxn modelId="{F439FE2E-FF8E-4CD8-BFFD-BE7EEFAF2CD9}" type="presParOf" srcId="{3E821FC4-A874-450B-8482-9337AC1C1E0B}" destId="{7FC7980B-78D1-4A8D-9208-76052E50D81B}" srcOrd="4" destOrd="0" presId="urn:microsoft.com/office/officeart/2024/3/layout/SimpleTimelineDefaultVariant"/>
-    <dgm:cxn modelId="{C839B3D7-FA36-4368-95FA-7BE550EAD3EA}" type="presParOf" srcId="{3E821FC4-A874-450B-8482-9337AC1C1E0B}" destId="{2A9B783C-D24D-49E5-BA81-DDD844BCDDD5}" srcOrd="5" destOrd="0" presId="urn:microsoft.com/office/officeart/2024/3/layout/SimpleTimelineDefaultVariant"/>
-    <dgm:cxn modelId="{7F3E5275-025F-467F-BC59-8850C540B5E7}" type="presParOf" srcId="{A7AE47DD-8DEC-4B56-9367-A4C3486B2D96}" destId="{0C971922-0DF1-44AF-961F-8011F77D6504}" srcOrd="3" destOrd="0" presId="urn:microsoft.com/office/officeart/2024/3/layout/SimpleTimelineDefaultVariant"/>
-    <dgm:cxn modelId="{F52E542C-BF1E-473A-9FE6-C8332DF61796}" type="presParOf" srcId="{A7AE47DD-8DEC-4B56-9367-A4C3486B2D96}" destId="{538F7CB4-9A53-484B-81CA-260A79B4F163}" srcOrd="4" destOrd="0" presId="urn:microsoft.com/office/officeart/2024/3/layout/SimpleTimelineDefaultVariant"/>
-    <dgm:cxn modelId="{1F92719C-70F5-4AEC-8718-EC9D23EE000E}" type="presParOf" srcId="{538F7CB4-9A53-484B-81CA-260A79B4F163}" destId="{682EA88A-A4E4-4AA7-9FB1-B83F193F2C39}" srcOrd="0" destOrd="0" presId="urn:microsoft.com/office/officeart/2024/3/layout/SimpleTimelineDefaultVariant"/>
-    <dgm:cxn modelId="{E8394B0F-FABF-4A66-8272-D704779E3955}" type="presParOf" srcId="{538F7CB4-9A53-484B-81CA-260A79B4F163}" destId="{A0323C5B-5787-4ABC-9130-A621889E8E36}" srcOrd="1" destOrd="0" presId="urn:microsoft.com/office/officeart/2024/3/layout/SimpleTimelineDefaultVariant"/>
-    <dgm:cxn modelId="{DFA795C5-1BE5-406A-A5C1-46CAF842C65B}" type="presParOf" srcId="{A0323C5B-5787-4ABC-9130-A621889E8E36}" destId="{4E9D8699-570F-428F-B34E-A8AE18B2A17F}" srcOrd="0" destOrd="0" presId="urn:microsoft.com/office/officeart/2024/3/layout/SimpleTimelineDefaultVariant"/>
-    <dgm:cxn modelId="{FE2CFF8C-3786-4B89-814B-8805E47100B5}" type="presParOf" srcId="{A0323C5B-5787-4ABC-9130-A621889E8E36}" destId="{64CCA8F3-173A-4D74-B9A2-49BDD6D8183A}" srcOrd="1" destOrd="0" presId="urn:microsoft.com/office/officeart/2024/3/layout/SimpleTimelineDefaultVariant"/>
-    <dgm:cxn modelId="{F1D6E3F3-896B-46D2-B758-C1A023A8727A}" type="presParOf" srcId="{538F7CB4-9A53-484B-81CA-260A79B4F163}" destId="{00D2B9ED-BE51-47B3-B26C-BA45F9641DBB}" srcOrd="2" destOrd="0" presId="urn:microsoft.com/office/officeart/2024/3/layout/SimpleTimelineDefaultVariant"/>
-    <dgm:cxn modelId="{61DAC549-64C1-4BC2-9902-2B8E9260B715}" type="presParOf" srcId="{538F7CB4-9A53-484B-81CA-260A79B4F163}" destId="{2664027A-B5AC-41CA-A071-5DF0CF1E8120}" srcOrd="3" destOrd="0" presId="urn:microsoft.com/office/officeart/2024/3/layout/SimpleTimelineDefaultVariant"/>
-    <dgm:cxn modelId="{73227FF1-FD14-40DA-8F97-EEA5063C7146}" type="presParOf" srcId="{538F7CB4-9A53-484B-81CA-260A79B4F163}" destId="{6F004247-9FD8-4E6D-9363-DE121E4356A0}" srcOrd="4" destOrd="0" presId="urn:microsoft.com/office/officeart/2024/3/layout/SimpleTimelineDefaultVariant"/>
-    <dgm:cxn modelId="{EA102EE5-CCAC-40F9-96C2-29BC90C93428}" type="presParOf" srcId="{538F7CB4-9A53-484B-81CA-260A79B4F163}" destId="{5A9AD2D3-337B-4134-B8ED-771B806C587F}" srcOrd="5" destOrd="0" presId="urn:microsoft.com/office/officeart/2024/3/layout/SimpleTimelineDefaultVariant"/>
-    <dgm:cxn modelId="{F75201D6-B601-4E44-8F3B-9539929B0435}" type="presParOf" srcId="{A7AE47DD-8DEC-4B56-9367-A4C3486B2D96}" destId="{A7600265-0C88-4CF8-BE9B-117522065D4D}" srcOrd="5" destOrd="0" presId="urn:microsoft.com/office/officeart/2024/3/layout/SimpleTimelineDefaultVariant"/>
-    <dgm:cxn modelId="{90999DAB-BF74-4FE6-9CD5-AA7785A6FF9F}" type="presParOf" srcId="{A7AE47DD-8DEC-4B56-9367-A4C3486B2D96}" destId="{2B5389DC-7DD6-4BC8-B779-D6F9230E7016}" srcOrd="6" destOrd="0" presId="urn:microsoft.com/office/officeart/2024/3/layout/SimpleTimelineDefaultVariant"/>
-    <dgm:cxn modelId="{53F6AF98-7C4A-4249-B349-F80D121553AD}" type="presParOf" srcId="{2B5389DC-7DD6-4BC8-B779-D6F9230E7016}" destId="{410FA866-99AD-47B6-AB30-6629B2F7603F}" srcOrd="0" destOrd="0" presId="urn:microsoft.com/office/officeart/2024/3/layout/SimpleTimelineDefaultVariant"/>
-    <dgm:cxn modelId="{31D25238-6D5A-45F5-A02F-6492772BEE25}" type="presParOf" srcId="{2B5389DC-7DD6-4BC8-B779-D6F9230E7016}" destId="{62656441-CCB5-4F11-87D3-A71692F13D3F}" srcOrd="1" destOrd="0" presId="urn:microsoft.com/office/officeart/2024/3/layout/SimpleTimelineDefaultVariant"/>
-    <dgm:cxn modelId="{A383E53A-6C18-4FC5-93B8-B3B396CCA704}" type="presParOf" srcId="{62656441-CCB5-4F11-87D3-A71692F13D3F}" destId="{1D54DDC9-D893-4C2D-937E-BD8391046565}" srcOrd="0" destOrd="0" presId="urn:microsoft.com/office/officeart/2024/3/layout/SimpleTimelineDefaultVariant"/>
-    <dgm:cxn modelId="{8088A9DF-5D2E-4158-B8EA-505CB0A079F6}" type="presParOf" srcId="{62656441-CCB5-4F11-87D3-A71692F13D3F}" destId="{A8F6EDE2-EF0C-457E-BC04-95B7917B5FF1}" srcOrd="1" destOrd="0" presId="urn:microsoft.com/office/officeart/2024/3/layout/SimpleTimelineDefaultVariant"/>
-    <dgm:cxn modelId="{C2E14D34-7E69-4FED-BA1D-7A3D731D5004}" type="presParOf" srcId="{2B5389DC-7DD6-4BC8-B779-D6F9230E7016}" destId="{229A8B9E-D26E-4B8B-B637-778F404FB5B5}" srcOrd="2" destOrd="0" presId="urn:microsoft.com/office/officeart/2024/3/layout/SimpleTimelineDefaultVariant"/>
-    <dgm:cxn modelId="{4B563E69-E6B7-44DF-A91C-9683B271AADA}" type="presParOf" srcId="{2B5389DC-7DD6-4BC8-B779-D6F9230E7016}" destId="{EE41F65A-AA70-4EE3-81F3-A539EF20984B}" srcOrd="3" destOrd="0" presId="urn:microsoft.com/office/officeart/2024/3/layout/SimpleTimelineDefaultVariant"/>
-    <dgm:cxn modelId="{F21209F1-47CD-4F2A-A61A-773227F00F17}" type="presParOf" srcId="{2B5389DC-7DD6-4BC8-B779-D6F9230E7016}" destId="{E28909AF-007C-49D7-8958-97FF1699473D}" srcOrd="4" destOrd="0" presId="urn:microsoft.com/office/officeart/2024/3/layout/SimpleTimelineDefaultVariant"/>
-    <dgm:cxn modelId="{B9C8F822-0E04-4EAE-BF1E-67E4F8F1D7CB}" type="presParOf" srcId="{2B5389DC-7DD6-4BC8-B779-D6F9230E7016}" destId="{6C0C9696-FE62-48F7-8988-6F70C68CBD83}" srcOrd="5" destOrd="0" presId="urn:microsoft.com/office/officeart/2024/3/layout/SimpleTimelineDefaultVariant"/>
-    <dgm:cxn modelId="{39E4C226-FDB8-4946-AD37-706DC60951D5}" type="presParOf" srcId="{A7AE47DD-8DEC-4B56-9367-A4C3486B2D96}" destId="{F46B52D1-BAB5-4C3E-A7AE-5109068EFB92}" srcOrd="7" destOrd="0" presId="urn:microsoft.com/office/officeart/2024/3/layout/SimpleTimelineDefaultVariant"/>
-    <dgm:cxn modelId="{9AD2EFDC-8C4B-45D9-9A46-40E77F649B3A}" type="presParOf" srcId="{A7AE47DD-8DEC-4B56-9367-A4C3486B2D96}" destId="{A74FF97E-7200-4943-9A5B-13D208BDD317}" srcOrd="8" destOrd="0" presId="urn:microsoft.com/office/officeart/2024/3/layout/SimpleTimelineDefaultVariant"/>
-    <dgm:cxn modelId="{439779B9-A317-480D-9DB2-CB4ABB91B42C}" type="presParOf" srcId="{A74FF97E-7200-4943-9A5B-13D208BDD317}" destId="{D1F0411E-85F0-49A3-90A8-C760162A06F7}" srcOrd="0" destOrd="0" presId="urn:microsoft.com/office/officeart/2024/3/layout/SimpleTimelineDefaultVariant"/>
-    <dgm:cxn modelId="{B0BB82D9-2307-4902-BB4D-3E93EA6A9BDF}" type="presParOf" srcId="{A74FF97E-7200-4943-9A5B-13D208BDD317}" destId="{F77DF66D-9675-47A7-ADD4-F35123143610}" srcOrd="1" destOrd="0" presId="urn:microsoft.com/office/officeart/2024/3/layout/SimpleTimelineDefaultVariant"/>
-    <dgm:cxn modelId="{57348B6C-83DF-475D-A249-9CF1383B42A9}" type="presParOf" srcId="{F77DF66D-9675-47A7-ADD4-F35123143610}" destId="{061DA4A7-7DD3-47A6-8F75-591FD3C5F66E}" srcOrd="0" destOrd="0" presId="urn:microsoft.com/office/officeart/2024/3/layout/SimpleTimelineDefaultVariant"/>
-    <dgm:cxn modelId="{C1E1FC12-A671-4C28-9E5F-27AA0E271B14}" type="presParOf" srcId="{F77DF66D-9675-47A7-ADD4-F35123143610}" destId="{0E07606D-90D6-4C46-9C6F-D1FA7A46AD31}" srcOrd="1" destOrd="0" presId="urn:microsoft.com/office/officeart/2024/3/layout/SimpleTimelineDefaultVariant"/>
-    <dgm:cxn modelId="{DD7C55D0-3FD6-49C7-B0D1-286FAFA9972E}" type="presParOf" srcId="{A74FF97E-7200-4943-9A5B-13D208BDD317}" destId="{A8C61B89-04C1-40B8-A753-92BDABE39300}" srcOrd="2" destOrd="0" presId="urn:microsoft.com/office/officeart/2024/3/layout/SimpleTimelineDefaultVariant"/>
-    <dgm:cxn modelId="{026D7794-4944-4905-A0CD-B835C658C491}" type="presParOf" srcId="{A74FF97E-7200-4943-9A5B-13D208BDD317}" destId="{F7F215AA-1548-4946-9818-24CE434B0257}" srcOrd="3" destOrd="0" presId="urn:microsoft.com/office/officeart/2024/3/layout/SimpleTimelineDefaultVariant"/>
-    <dgm:cxn modelId="{041D6367-4C51-4602-8F6C-B1995E75FE21}" type="presParOf" srcId="{A74FF97E-7200-4943-9A5B-13D208BDD317}" destId="{A657FCB3-50B0-4F61-A00C-56D9B387AFBF}" srcOrd="4" destOrd="0" presId="urn:microsoft.com/office/officeart/2024/3/layout/SimpleTimelineDefaultVariant"/>
-    <dgm:cxn modelId="{B4CFE80C-7B2C-4F56-94A5-746687959957}" type="presParOf" srcId="{A74FF97E-7200-4943-9A5B-13D208BDD317}" destId="{7D6140CA-EF57-4603-ADAF-5E5FB81F7207}" srcOrd="5" destOrd="0" presId="urn:microsoft.com/office/officeart/2024/3/layout/SimpleTimelineDefaultVariant"/>
-    <dgm:cxn modelId="{D304F211-7B3B-4547-B60C-D5F7207D550F}" type="presParOf" srcId="{A7AE47DD-8DEC-4B56-9367-A4C3486B2D96}" destId="{D2C454B8-04D6-4E6C-8355-673339559618}" srcOrd="9" destOrd="0" presId="urn:microsoft.com/office/officeart/2024/3/layout/SimpleTimelineDefaultVariant"/>
-    <dgm:cxn modelId="{E3D403C9-48FB-4573-8BCA-E6E3D60A524D}" type="presParOf" srcId="{A7AE47DD-8DEC-4B56-9367-A4C3486B2D96}" destId="{5C62CD98-B098-4A3E-B2A4-EA65C368F917}" srcOrd="10" destOrd="0" presId="urn:microsoft.com/office/officeart/2024/3/layout/SimpleTimelineDefaultVariant"/>
-    <dgm:cxn modelId="{5DB048C4-F9C1-4243-A3CA-6DD6F69F5196}" type="presParOf" srcId="{5C62CD98-B098-4A3E-B2A4-EA65C368F917}" destId="{5657EE69-424A-4CD8-B5EE-7DBEE83B0DC9}" srcOrd="0" destOrd="0" presId="urn:microsoft.com/office/officeart/2024/3/layout/SimpleTimelineDefaultVariant"/>
-    <dgm:cxn modelId="{730762BA-9A35-4248-BFA0-C802F64B96DE}" type="presParOf" srcId="{5C62CD98-B098-4A3E-B2A4-EA65C368F917}" destId="{8D4F6ED0-44B8-4C59-99DC-C619DDB1D906}" srcOrd="1" destOrd="0" presId="urn:microsoft.com/office/officeart/2024/3/layout/SimpleTimelineDefaultVariant"/>
-    <dgm:cxn modelId="{0D0FDA4E-ED0F-4FBD-BEE7-3381811E686F}" type="presParOf" srcId="{8D4F6ED0-44B8-4C59-99DC-C619DDB1D906}" destId="{72EA4842-5C5D-4BE9-9AD2-6FAF498B2540}" srcOrd="0" destOrd="0" presId="urn:microsoft.com/office/officeart/2024/3/layout/SimpleTimelineDefaultVariant"/>
-    <dgm:cxn modelId="{23DCA478-FDAB-4935-A0D6-BB0C9BBDA4EF}" type="presParOf" srcId="{8D4F6ED0-44B8-4C59-99DC-C619DDB1D906}" destId="{703E798C-4E72-4A6C-AD2F-3EEC1D89A51B}" srcOrd="1" destOrd="0" presId="urn:microsoft.com/office/officeart/2024/3/layout/SimpleTimelineDefaultVariant"/>
-    <dgm:cxn modelId="{2C25DD2F-D297-4C2A-8575-83947E0839CA}" type="presParOf" srcId="{5C62CD98-B098-4A3E-B2A4-EA65C368F917}" destId="{7B4887C6-E1B4-4412-86BB-F455A05D8A46}" srcOrd="2" destOrd="0" presId="urn:microsoft.com/office/officeart/2024/3/layout/SimpleTimelineDefaultVariant"/>
-    <dgm:cxn modelId="{F129AD50-DB14-4D3B-8987-E74751FE1AD0}" type="presParOf" srcId="{5C62CD98-B098-4A3E-B2A4-EA65C368F917}" destId="{415234FF-8B2B-48A0-B0A8-E0517D1909DD}" srcOrd="3" destOrd="0" presId="urn:microsoft.com/office/officeart/2024/3/layout/SimpleTimelineDefaultVariant"/>
-    <dgm:cxn modelId="{7B5BC618-0C54-4A22-975B-B75C87795475}" type="presParOf" srcId="{5C62CD98-B098-4A3E-B2A4-EA65C368F917}" destId="{573D2282-3279-4BF1-B7CA-BAB23F064BDC}" srcOrd="4" destOrd="0" presId="urn:microsoft.com/office/officeart/2024/3/layout/SimpleTimelineDefaultVariant"/>
-    <dgm:cxn modelId="{E613A87E-9E64-4727-871E-8AA26DD02402}" type="presParOf" srcId="{5C62CD98-B098-4A3E-B2A4-EA65C368F917}" destId="{4E1E2890-8665-4899-9FC8-69300C2D910D}" srcOrd="5" destOrd="0" presId="urn:microsoft.com/office/officeart/2024/3/layout/SimpleTimelineDefaultVariant"/>
+    <dgm:cxn modelId="{F5FEECF3-0E4E-41ED-811E-ABF9F6A52FCC}" type="presOf" srcId="{CF314EE2-D6D7-4536-A6FD-41DF85B6060B}" destId="{01E41ACE-E33B-41B9-A714-73522D3F7C76}" srcOrd="0" destOrd="0" presId="urn:microsoft.com/office/officeart/2024/3/layout/SimpleTimelineDefaultVariant"/>
+    <dgm:cxn modelId="{C24189AC-27B4-4357-8D10-DE45B7B83E42}" type="presParOf" srcId="{9AE89FB1-F474-491F-AB27-A0F134775DF5}" destId="{B7BF8D1E-0607-4B5F-981C-154E326D1064}" srcOrd="0" destOrd="0" presId="urn:microsoft.com/office/officeart/2024/3/layout/SimpleTimelineDefaultVariant"/>
+    <dgm:cxn modelId="{9E2F82D7-9F91-4FB7-8025-340C673B0012}" type="presParOf" srcId="{9AE89FB1-F474-491F-AB27-A0F134775DF5}" destId="{A7AE47DD-8DEC-4B56-9367-A4C3486B2D96}" srcOrd="1" destOrd="0" presId="urn:microsoft.com/office/officeart/2024/3/layout/SimpleTimelineDefaultVariant"/>
+    <dgm:cxn modelId="{D26805B3-14B9-4E8E-8A62-C0940AB85559}" type="presParOf" srcId="{A7AE47DD-8DEC-4B56-9367-A4C3486B2D96}" destId="{53FB245B-549F-41A8-85A7-8DC9298ABFD7}" srcOrd="0" destOrd="0" presId="urn:microsoft.com/office/officeart/2024/3/layout/SimpleTimelineDefaultVariant"/>
+    <dgm:cxn modelId="{3A875991-39E2-418D-8E53-FB67210003B2}" type="presParOf" srcId="{53FB245B-549F-41A8-85A7-8DC9298ABFD7}" destId="{34DD218C-FBA4-4914-8E86-E286CBBF679B}" srcOrd="0" destOrd="0" presId="urn:microsoft.com/office/officeart/2024/3/layout/SimpleTimelineDefaultVariant"/>
+    <dgm:cxn modelId="{16A604B0-CAF0-408C-889B-559CA9DDE162}" type="presParOf" srcId="{53FB245B-549F-41A8-85A7-8DC9298ABFD7}" destId="{D7F5E375-D0CA-42FC-835A-31381C5E5D37}" srcOrd="1" destOrd="0" presId="urn:microsoft.com/office/officeart/2024/3/layout/SimpleTimelineDefaultVariant"/>
+    <dgm:cxn modelId="{9416A44C-B1C9-4EAB-AED3-B8046AA1DFE9}" type="presParOf" srcId="{D7F5E375-D0CA-42FC-835A-31381C5E5D37}" destId="{90BFAD0B-06DA-4B4F-B83D-5C02B8A89EC4}" srcOrd="0" destOrd="0" presId="urn:microsoft.com/office/officeart/2024/3/layout/SimpleTimelineDefaultVariant"/>
+    <dgm:cxn modelId="{0AE12C9E-FC21-40ED-A491-D3BB239207BF}" type="presParOf" srcId="{D7F5E375-D0CA-42FC-835A-31381C5E5D37}" destId="{3941855B-9F45-4A82-956B-02684A432AA5}" srcOrd="1" destOrd="0" presId="urn:microsoft.com/office/officeart/2024/3/layout/SimpleTimelineDefaultVariant"/>
+    <dgm:cxn modelId="{8B2BB449-750B-40CC-B19D-C3AA36D0F7C9}" type="presParOf" srcId="{53FB245B-549F-41A8-85A7-8DC9298ABFD7}" destId="{31877334-3A87-4D72-A1B1-F99AFF9D710D}" srcOrd="2" destOrd="0" presId="urn:microsoft.com/office/officeart/2024/3/layout/SimpleTimelineDefaultVariant"/>
+    <dgm:cxn modelId="{FAC1A199-29FA-4D12-80DE-7D805FE29A22}" type="presParOf" srcId="{53FB245B-549F-41A8-85A7-8DC9298ABFD7}" destId="{01E41ACE-E33B-41B9-A714-73522D3F7C76}" srcOrd="3" destOrd="0" presId="urn:microsoft.com/office/officeart/2024/3/layout/SimpleTimelineDefaultVariant"/>
+    <dgm:cxn modelId="{C283496A-5CBB-4AB0-B17D-6690EFC171AF}" type="presParOf" srcId="{53FB245B-549F-41A8-85A7-8DC9298ABFD7}" destId="{CEE8CE24-AD73-4777-BAB3-4A5D9CE74308}" srcOrd="4" destOrd="0" presId="urn:microsoft.com/office/officeart/2024/3/layout/SimpleTimelineDefaultVariant"/>
+    <dgm:cxn modelId="{20625C16-FD2C-4CD9-A5A1-44428B1F974C}" type="presParOf" srcId="{53FB245B-549F-41A8-85A7-8DC9298ABFD7}" destId="{CA0DAB95-CF81-4C72-99EC-F6A08D694850}" srcOrd="5" destOrd="0" presId="urn:microsoft.com/office/officeart/2024/3/layout/SimpleTimelineDefaultVariant"/>
+    <dgm:cxn modelId="{AB54936B-D3DF-47E6-808E-4F93D5D51334}" type="presParOf" srcId="{A7AE47DD-8DEC-4B56-9367-A4C3486B2D96}" destId="{5B1444F8-B111-4850-AE5F-D928CB18CD7B}" srcOrd="1" destOrd="0" presId="urn:microsoft.com/office/officeart/2024/3/layout/SimpleTimelineDefaultVariant"/>
+    <dgm:cxn modelId="{68500476-F60F-4770-8D73-7D1FDEC4555A}" type="presParOf" srcId="{A7AE47DD-8DEC-4B56-9367-A4C3486B2D96}" destId="{3E821FC4-A874-450B-8482-9337AC1C1E0B}" srcOrd="2" destOrd="0" presId="urn:microsoft.com/office/officeart/2024/3/layout/SimpleTimelineDefaultVariant"/>
+    <dgm:cxn modelId="{F15DD3FA-1B3C-438A-8C7D-B3744E9B3E7B}" type="presParOf" srcId="{3E821FC4-A874-450B-8482-9337AC1C1E0B}" destId="{0D3203CA-3A44-4E67-9918-35447FA83302}" srcOrd="0" destOrd="0" presId="urn:microsoft.com/office/officeart/2024/3/layout/SimpleTimelineDefaultVariant"/>
+    <dgm:cxn modelId="{7B437E1C-3B9E-419C-A8A0-76475E1BB31C}" type="presParOf" srcId="{3E821FC4-A874-450B-8482-9337AC1C1E0B}" destId="{167C0091-4211-46CD-8319-88B0084C9D44}" srcOrd="1" destOrd="0" presId="urn:microsoft.com/office/officeart/2024/3/layout/SimpleTimelineDefaultVariant"/>
+    <dgm:cxn modelId="{62F6805A-4382-4E7D-895E-847B19A10C47}" type="presParOf" srcId="{167C0091-4211-46CD-8319-88B0084C9D44}" destId="{DC0398C9-F266-4E41-85EE-CAB679514169}" srcOrd="0" destOrd="0" presId="urn:microsoft.com/office/officeart/2024/3/layout/SimpleTimelineDefaultVariant"/>
+    <dgm:cxn modelId="{91830E85-4EE5-4FF3-A071-4B14116FDC5F}" type="presParOf" srcId="{167C0091-4211-46CD-8319-88B0084C9D44}" destId="{591D0C9E-F3BD-4ACE-A927-797BE3DA39DF}" srcOrd="1" destOrd="0" presId="urn:microsoft.com/office/officeart/2024/3/layout/SimpleTimelineDefaultVariant"/>
+    <dgm:cxn modelId="{243E3225-C217-4BAF-A3C4-E7D0572DCEC5}" type="presParOf" srcId="{3E821FC4-A874-450B-8482-9337AC1C1E0B}" destId="{443870C5-2799-47B5-AA6B-A0C45107D3FC}" srcOrd="2" destOrd="0" presId="urn:microsoft.com/office/officeart/2024/3/layout/SimpleTimelineDefaultVariant"/>
+    <dgm:cxn modelId="{11BD67AB-B2F0-493C-849E-C2317D329052}" type="presParOf" srcId="{3E821FC4-A874-450B-8482-9337AC1C1E0B}" destId="{89EF5014-7ECE-4300-A882-B69FFA73745D}" srcOrd="3" destOrd="0" presId="urn:microsoft.com/office/officeart/2024/3/layout/SimpleTimelineDefaultVariant"/>
+    <dgm:cxn modelId="{9F2E0066-76EA-47FE-921F-EBD26DDDC9AC}" type="presParOf" srcId="{3E821FC4-A874-450B-8482-9337AC1C1E0B}" destId="{7FC7980B-78D1-4A8D-9208-76052E50D81B}" srcOrd="4" destOrd="0" presId="urn:microsoft.com/office/officeart/2024/3/layout/SimpleTimelineDefaultVariant"/>
+    <dgm:cxn modelId="{10AA9EBB-28BE-4C89-B51D-B4335AA1EBB0}" type="presParOf" srcId="{3E821FC4-A874-450B-8482-9337AC1C1E0B}" destId="{2A9B783C-D24D-49E5-BA81-DDD844BCDDD5}" srcOrd="5" destOrd="0" presId="urn:microsoft.com/office/officeart/2024/3/layout/SimpleTimelineDefaultVariant"/>
+    <dgm:cxn modelId="{B0B70265-6726-42EA-9193-6E4E45D2EF8E}" type="presParOf" srcId="{A7AE47DD-8DEC-4B56-9367-A4C3486B2D96}" destId="{0C971922-0DF1-44AF-961F-8011F77D6504}" srcOrd="3" destOrd="0" presId="urn:microsoft.com/office/officeart/2024/3/layout/SimpleTimelineDefaultVariant"/>
+    <dgm:cxn modelId="{1BC24FDD-BEC9-4B52-AD53-4873A770C741}" type="presParOf" srcId="{A7AE47DD-8DEC-4B56-9367-A4C3486B2D96}" destId="{354A0EB9-C15D-4EED-AD7A-4BA0BD6EA95F}" srcOrd="4" destOrd="0" presId="urn:microsoft.com/office/officeart/2024/3/layout/SimpleTimelineDefaultVariant"/>
+    <dgm:cxn modelId="{5B1A4CCF-0626-46AF-AE59-15A2AF80FAD1}" type="presParOf" srcId="{354A0EB9-C15D-4EED-AD7A-4BA0BD6EA95F}" destId="{6B3B44FD-CD55-49A1-9D46-7D8BE7ECC7DC}" srcOrd="0" destOrd="0" presId="urn:microsoft.com/office/officeart/2024/3/layout/SimpleTimelineDefaultVariant"/>
+    <dgm:cxn modelId="{B994924A-B6E9-414D-A191-DE462C0AAE27}" type="presParOf" srcId="{354A0EB9-C15D-4EED-AD7A-4BA0BD6EA95F}" destId="{A462C6F2-48E5-4BD6-909A-4F12CDF07C3F}" srcOrd="1" destOrd="0" presId="urn:microsoft.com/office/officeart/2024/3/layout/SimpleTimelineDefaultVariant"/>
+    <dgm:cxn modelId="{F79E06E8-C578-4A08-A818-05056FCD0273}" type="presParOf" srcId="{A462C6F2-48E5-4BD6-909A-4F12CDF07C3F}" destId="{7426B390-11A9-467C-8863-3A0BEAE74606}" srcOrd="0" destOrd="0" presId="urn:microsoft.com/office/officeart/2024/3/layout/SimpleTimelineDefaultVariant"/>
+    <dgm:cxn modelId="{1552B243-7703-4DCC-BBC0-EAEF3E98D8B0}" type="presParOf" srcId="{A462C6F2-48E5-4BD6-909A-4F12CDF07C3F}" destId="{CCC1B053-3ECB-4D6B-98FE-E0527430F655}" srcOrd="1" destOrd="0" presId="urn:microsoft.com/office/officeart/2024/3/layout/SimpleTimelineDefaultVariant"/>
+    <dgm:cxn modelId="{3F9DCAE7-40F1-4FD9-A0D1-2021E3A4326C}" type="presParOf" srcId="{354A0EB9-C15D-4EED-AD7A-4BA0BD6EA95F}" destId="{0C33ADDC-85D4-4DBF-83AE-CB3AB9747E6D}" srcOrd="2" destOrd="0" presId="urn:microsoft.com/office/officeart/2024/3/layout/SimpleTimelineDefaultVariant"/>
+    <dgm:cxn modelId="{AE98DC54-9260-4D8C-BD9B-7839FDB30769}" type="presParOf" srcId="{354A0EB9-C15D-4EED-AD7A-4BA0BD6EA95F}" destId="{F60B4A9E-2A40-44D1-A1A8-F4A47B5C2960}" srcOrd="3" destOrd="0" presId="urn:microsoft.com/office/officeart/2024/3/layout/SimpleTimelineDefaultVariant"/>
+    <dgm:cxn modelId="{A282294A-2093-4194-B2F3-3E0F7BF91D85}" type="presParOf" srcId="{354A0EB9-C15D-4EED-AD7A-4BA0BD6EA95F}" destId="{46D358C1-2023-4C84-9A53-DF8EDD80A1F7}" srcOrd="4" destOrd="0" presId="urn:microsoft.com/office/officeart/2024/3/layout/SimpleTimelineDefaultVariant"/>
+    <dgm:cxn modelId="{0478A3A2-83DA-4ECE-98E0-B2C5F77094A4}" type="presParOf" srcId="{354A0EB9-C15D-4EED-AD7A-4BA0BD6EA95F}" destId="{91C0AD43-BE18-4658-8D0F-AC469508DD81}" srcOrd="5" destOrd="0" presId="urn:microsoft.com/office/officeart/2024/3/layout/SimpleTimelineDefaultVariant"/>
+    <dgm:cxn modelId="{0621C6AE-AB09-4443-B59D-ADADFBE5B777}" type="presParOf" srcId="{A7AE47DD-8DEC-4B56-9367-A4C3486B2D96}" destId="{6AAB63EC-3F70-439E-A8AD-139B441D156F}" srcOrd="5" destOrd="0" presId="urn:microsoft.com/office/officeart/2024/3/layout/SimpleTimelineDefaultVariant"/>
+    <dgm:cxn modelId="{E90DE218-8236-4833-A18F-E8114BE91399}" type="presParOf" srcId="{A7AE47DD-8DEC-4B56-9367-A4C3486B2D96}" destId="{538F7CB4-9A53-484B-81CA-260A79B4F163}" srcOrd="6" destOrd="0" presId="urn:microsoft.com/office/officeart/2024/3/layout/SimpleTimelineDefaultVariant"/>
+    <dgm:cxn modelId="{3364C67E-E876-44D0-A63B-523C65978BC6}" type="presParOf" srcId="{538F7CB4-9A53-484B-81CA-260A79B4F163}" destId="{682EA88A-A4E4-4AA7-9FB1-B83F193F2C39}" srcOrd="0" destOrd="0" presId="urn:microsoft.com/office/officeart/2024/3/layout/SimpleTimelineDefaultVariant"/>
+    <dgm:cxn modelId="{EB5B7D33-B07B-41F7-8D93-89FB404FF971}" type="presParOf" srcId="{538F7CB4-9A53-484B-81CA-260A79B4F163}" destId="{A0323C5B-5787-4ABC-9130-A621889E8E36}" srcOrd="1" destOrd="0" presId="urn:microsoft.com/office/officeart/2024/3/layout/SimpleTimelineDefaultVariant"/>
+    <dgm:cxn modelId="{10237592-78DC-4B75-8A9C-4D2E1FEB4A3E}" type="presParOf" srcId="{A0323C5B-5787-4ABC-9130-A621889E8E36}" destId="{4E9D8699-570F-428F-B34E-A8AE18B2A17F}" srcOrd="0" destOrd="0" presId="urn:microsoft.com/office/officeart/2024/3/layout/SimpleTimelineDefaultVariant"/>
+    <dgm:cxn modelId="{6C2D5EBA-BF79-4BC3-8F1E-ABD36AB6D6F4}" type="presParOf" srcId="{A0323C5B-5787-4ABC-9130-A621889E8E36}" destId="{64CCA8F3-173A-4D74-B9A2-49BDD6D8183A}" srcOrd="1" destOrd="0" presId="urn:microsoft.com/office/officeart/2024/3/layout/SimpleTimelineDefaultVariant"/>
+    <dgm:cxn modelId="{EFCD347F-4539-4E5B-B5FC-46996157C759}" type="presParOf" srcId="{538F7CB4-9A53-484B-81CA-260A79B4F163}" destId="{00D2B9ED-BE51-47B3-B26C-BA45F9641DBB}" srcOrd="2" destOrd="0" presId="urn:microsoft.com/office/officeart/2024/3/layout/SimpleTimelineDefaultVariant"/>
+    <dgm:cxn modelId="{BFB0CAE9-10A5-49D5-BE40-4B1F5A3DBD33}" type="presParOf" srcId="{538F7CB4-9A53-484B-81CA-260A79B4F163}" destId="{2664027A-B5AC-41CA-A071-5DF0CF1E8120}" srcOrd="3" destOrd="0" presId="urn:microsoft.com/office/officeart/2024/3/layout/SimpleTimelineDefaultVariant"/>
+    <dgm:cxn modelId="{043999E4-6891-4C72-B312-6A29039B046A}" type="presParOf" srcId="{538F7CB4-9A53-484B-81CA-260A79B4F163}" destId="{6F004247-9FD8-4E6D-9363-DE121E4356A0}" srcOrd="4" destOrd="0" presId="urn:microsoft.com/office/officeart/2024/3/layout/SimpleTimelineDefaultVariant"/>
+    <dgm:cxn modelId="{89115B1E-B9F9-48DE-9FC2-FC198698D590}" type="presParOf" srcId="{538F7CB4-9A53-484B-81CA-260A79B4F163}" destId="{5A9AD2D3-337B-4134-B8ED-771B806C587F}" srcOrd="5" destOrd="0" presId="urn:microsoft.com/office/officeart/2024/3/layout/SimpleTimelineDefaultVariant"/>
+    <dgm:cxn modelId="{8C044547-01B3-451A-AC97-C508B59ED94C}" type="presParOf" srcId="{A7AE47DD-8DEC-4B56-9367-A4C3486B2D96}" destId="{A7600265-0C88-4CF8-BE9B-117522065D4D}" srcOrd="7" destOrd="0" presId="urn:microsoft.com/office/officeart/2024/3/layout/SimpleTimelineDefaultVariant"/>
+    <dgm:cxn modelId="{7F3125E8-5786-4064-872B-2646E60F4A7F}" type="presParOf" srcId="{A7AE47DD-8DEC-4B56-9367-A4C3486B2D96}" destId="{2B5389DC-7DD6-4BC8-B779-D6F9230E7016}" srcOrd="8" destOrd="0" presId="urn:microsoft.com/office/officeart/2024/3/layout/SimpleTimelineDefaultVariant"/>
+    <dgm:cxn modelId="{7E7217F6-32E6-4D94-A017-0B15506C024E}" type="presParOf" srcId="{2B5389DC-7DD6-4BC8-B779-D6F9230E7016}" destId="{410FA866-99AD-47B6-AB30-6629B2F7603F}" srcOrd="0" destOrd="0" presId="urn:microsoft.com/office/officeart/2024/3/layout/SimpleTimelineDefaultVariant"/>
+    <dgm:cxn modelId="{BD090066-E7C9-4B41-8773-CE6DEBBC29E5}" type="presParOf" srcId="{2B5389DC-7DD6-4BC8-B779-D6F9230E7016}" destId="{62656441-CCB5-4F11-87D3-A71692F13D3F}" srcOrd="1" destOrd="0" presId="urn:microsoft.com/office/officeart/2024/3/layout/SimpleTimelineDefaultVariant"/>
+    <dgm:cxn modelId="{51D91D65-BEDE-42C2-9D2E-2C78AA850A10}" type="presParOf" srcId="{62656441-CCB5-4F11-87D3-A71692F13D3F}" destId="{1D54DDC9-D893-4C2D-937E-BD8391046565}" srcOrd="0" destOrd="0" presId="urn:microsoft.com/office/officeart/2024/3/layout/SimpleTimelineDefaultVariant"/>
+    <dgm:cxn modelId="{2C41DA4F-70E8-480A-A8E6-22987C8D4A97}" type="presParOf" srcId="{62656441-CCB5-4F11-87D3-A71692F13D3F}" destId="{A8F6EDE2-EF0C-457E-BC04-95B7917B5FF1}" srcOrd="1" destOrd="0" presId="urn:microsoft.com/office/officeart/2024/3/layout/SimpleTimelineDefaultVariant"/>
+    <dgm:cxn modelId="{2EE9620B-5C00-4AC7-B7D3-7275B9E35C96}" type="presParOf" srcId="{2B5389DC-7DD6-4BC8-B779-D6F9230E7016}" destId="{229A8B9E-D26E-4B8B-B637-778F404FB5B5}" srcOrd="2" destOrd="0" presId="urn:microsoft.com/office/officeart/2024/3/layout/SimpleTimelineDefaultVariant"/>
+    <dgm:cxn modelId="{9ED06799-86F1-4334-BD98-9DF2284AD4E1}" type="presParOf" srcId="{2B5389DC-7DD6-4BC8-B779-D6F9230E7016}" destId="{EE41F65A-AA70-4EE3-81F3-A539EF20984B}" srcOrd="3" destOrd="0" presId="urn:microsoft.com/office/officeart/2024/3/layout/SimpleTimelineDefaultVariant"/>
+    <dgm:cxn modelId="{D53DA2DA-7FDA-49AB-A895-42E19F4594D3}" type="presParOf" srcId="{2B5389DC-7DD6-4BC8-B779-D6F9230E7016}" destId="{E28909AF-007C-49D7-8958-97FF1699473D}" srcOrd="4" destOrd="0" presId="urn:microsoft.com/office/officeart/2024/3/layout/SimpleTimelineDefaultVariant"/>
+    <dgm:cxn modelId="{39928A3F-B031-4DE5-A92E-2B0AA43D0C56}" type="presParOf" srcId="{2B5389DC-7DD6-4BC8-B779-D6F9230E7016}" destId="{6C0C9696-FE62-48F7-8988-6F70C68CBD83}" srcOrd="5" destOrd="0" presId="urn:microsoft.com/office/officeart/2024/3/layout/SimpleTimelineDefaultVariant"/>
+    <dgm:cxn modelId="{D588E23F-FD81-4279-8D49-C7665A227980}" type="presParOf" srcId="{A7AE47DD-8DEC-4B56-9367-A4C3486B2D96}" destId="{F46B52D1-BAB5-4C3E-A7AE-5109068EFB92}" srcOrd="9" destOrd="0" presId="urn:microsoft.com/office/officeart/2024/3/layout/SimpleTimelineDefaultVariant"/>
+    <dgm:cxn modelId="{EB424766-3D09-40D7-9F33-3E6EF3A7A444}" type="presParOf" srcId="{A7AE47DD-8DEC-4B56-9367-A4C3486B2D96}" destId="{A74FF97E-7200-4943-9A5B-13D208BDD317}" srcOrd="10" destOrd="0" presId="urn:microsoft.com/office/officeart/2024/3/layout/SimpleTimelineDefaultVariant"/>
+    <dgm:cxn modelId="{4B5B4598-4A3F-4E00-83F7-927070D82052}" type="presParOf" srcId="{A74FF97E-7200-4943-9A5B-13D208BDD317}" destId="{D1F0411E-85F0-49A3-90A8-C760162A06F7}" srcOrd="0" destOrd="0" presId="urn:microsoft.com/office/officeart/2024/3/layout/SimpleTimelineDefaultVariant"/>
+    <dgm:cxn modelId="{D47A4AB0-771A-4C2D-A2EA-BF1CEC17694A}" type="presParOf" srcId="{A74FF97E-7200-4943-9A5B-13D208BDD317}" destId="{F77DF66D-9675-47A7-ADD4-F35123143610}" srcOrd="1" destOrd="0" presId="urn:microsoft.com/office/officeart/2024/3/layout/SimpleTimelineDefaultVariant"/>
+    <dgm:cxn modelId="{943F4217-20E8-457D-9434-928165C8FA28}" type="presParOf" srcId="{F77DF66D-9675-47A7-ADD4-F35123143610}" destId="{061DA4A7-7DD3-47A6-8F75-591FD3C5F66E}" srcOrd="0" destOrd="0" presId="urn:microsoft.com/office/officeart/2024/3/layout/SimpleTimelineDefaultVariant"/>
+    <dgm:cxn modelId="{886493E7-8992-427A-BB43-3449E6A8CC78}" type="presParOf" srcId="{F77DF66D-9675-47A7-ADD4-F35123143610}" destId="{0E07606D-90D6-4C46-9C6F-D1FA7A46AD31}" srcOrd="1" destOrd="0" presId="urn:microsoft.com/office/officeart/2024/3/layout/SimpleTimelineDefaultVariant"/>
+    <dgm:cxn modelId="{A7E6C84A-710E-4970-B70E-BE9987C5D172}" type="presParOf" srcId="{A74FF97E-7200-4943-9A5B-13D208BDD317}" destId="{A8C61B89-04C1-40B8-A753-92BDABE39300}" srcOrd="2" destOrd="0" presId="urn:microsoft.com/office/officeart/2024/3/layout/SimpleTimelineDefaultVariant"/>
+    <dgm:cxn modelId="{40C11CED-FC2B-4D27-B094-8159042E2689}" type="presParOf" srcId="{A74FF97E-7200-4943-9A5B-13D208BDD317}" destId="{F7F215AA-1548-4946-9818-24CE434B0257}" srcOrd="3" destOrd="0" presId="urn:microsoft.com/office/officeart/2024/3/layout/SimpleTimelineDefaultVariant"/>
+    <dgm:cxn modelId="{565C1E62-E69C-4713-9F75-18D7E7D2781E}" type="presParOf" srcId="{A74FF97E-7200-4943-9A5B-13D208BDD317}" destId="{A657FCB3-50B0-4F61-A00C-56D9B387AFBF}" srcOrd="4" destOrd="0" presId="urn:microsoft.com/office/officeart/2024/3/layout/SimpleTimelineDefaultVariant"/>
+    <dgm:cxn modelId="{762A0548-C4EA-4373-90C8-171BF1F30ECD}" type="presParOf" srcId="{A74FF97E-7200-4943-9A5B-13D208BDD317}" destId="{7D6140CA-EF57-4603-ADAF-5E5FB81F7207}" srcOrd="5" destOrd="0" presId="urn:microsoft.com/office/officeart/2024/3/layout/SimpleTimelineDefaultVariant"/>
+    <dgm:cxn modelId="{0C39EBB7-B5FA-4322-92C4-3BD1E3263E0B}" type="presParOf" srcId="{A7AE47DD-8DEC-4B56-9367-A4C3486B2D96}" destId="{D2C454B8-04D6-4E6C-8355-673339559618}" srcOrd="11" destOrd="0" presId="urn:microsoft.com/office/officeart/2024/3/layout/SimpleTimelineDefaultVariant"/>
+    <dgm:cxn modelId="{76674CE4-4E55-4E04-B6C0-AE2A48C54DE3}" type="presParOf" srcId="{A7AE47DD-8DEC-4B56-9367-A4C3486B2D96}" destId="{5C62CD98-B098-4A3E-B2A4-EA65C368F917}" srcOrd="12" destOrd="0" presId="urn:microsoft.com/office/officeart/2024/3/layout/SimpleTimelineDefaultVariant"/>
+    <dgm:cxn modelId="{04CA419B-3CF8-4C6E-9D20-61C6C2ED424D}" type="presParOf" srcId="{5C62CD98-B098-4A3E-B2A4-EA65C368F917}" destId="{5657EE69-424A-4CD8-B5EE-7DBEE83B0DC9}" srcOrd="0" destOrd="0" presId="urn:microsoft.com/office/officeart/2024/3/layout/SimpleTimelineDefaultVariant"/>
+    <dgm:cxn modelId="{6EBE45DF-6E5E-4C9D-A4EA-65211537C0C9}" type="presParOf" srcId="{5C62CD98-B098-4A3E-B2A4-EA65C368F917}" destId="{8D4F6ED0-44B8-4C59-99DC-C619DDB1D906}" srcOrd="1" destOrd="0" presId="urn:microsoft.com/office/officeart/2024/3/layout/SimpleTimelineDefaultVariant"/>
+    <dgm:cxn modelId="{C5CC37C1-1235-45DE-B9AB-C5C40395EB9A}" type="presParOf" srcId="{8D4F6ED0-44B8-4C59-99DC-C619DDB1D906}" destId="{72EA4842-5C5D-4BE9-9AD2-6FAF498B2540}" srcOrd="0" destOrd="0" presId="urn:microsoft.com/office/officeart/2024/3/layout/SimpleTimelineDefaultVariant"/>
+    <dgm:cxn modelId="{F444AB31-3173-4D37-A566-42E3379482DF}" type="presParOf" srcId="{8D4F6ED0-44B8-4C59-99DC-C619DDB1D906}" destId="{703E798C-4E72-4A6C-AD2F-3EEC1D89A51B}" srcOrd="1" destOrd="0" presId="urn:microsoft.com/office/officeart/2024/3/layout/SimpleTimelineDefaultVariant"/>
+    <dgm:cxn modelId="{678574D9-11F4-4189-9E2C-CC1C97331CC5}" type="presParOf" srcId="{5C62CD98-B098-4A3E-B2A4-EA65C368F917}" destId="{7B4887C6-E1B4-4412-86BB-F455A05D8A46}" srcOrd="2" destOrd="0" presId="urn:microsoft.com/office/officeart/2024/3/layout/SimpleTimelineDefaultVariant"/>
+    <dgm:cxn modelId="{A2D24103-09AE-46FE-A893-9634F839D2A5}" type="presParOf" srcId="{5C62CD98-B098-4A3E-B2A4-EA65C368F917}" destId="{415234FF-8B2B-48A0-B0A8-E0517D1909DD}" srcOrd="3" destOrd="0" presId="urn:microsoft.com/office/officeart/2024/3/layout/SimpleTimelineDefaultVariant"/>
+    <dgm:cxn modelId="{C768CFEA-136C-43ED-97A4-34E63EF77343}" type="presParOf" srcId="{5C62CD98-B098-4A3E-B2A4-EA65C368F917}" destId="{573D2282-3279-4BF1-B7CA-BAB23F064BDC}" srcOrd="4" destOrd="0" presId="urn:microsoft.com/office/officeart/2024/3/layout/SimpleTimelineDefaultVariant"/>
+    <dgm:cxn modelId="{A696A060-1BFE-4AB0-A58E-4A86508E3D57}" type="presParOf" srcId="{5C62CD98-B098-4A3E-B2A4-EA65C368F917}" destId="{4E1E2890-8665-4899-9FC8-69300C2D910D}" srcOrd="5" destOrd="0" presId="urn:microsoft.com/office/officeart/2024/3/layout/SimpleTimelineDefaultVariant"/>
   </dgm:cxnLst>
   <dgm:bg/>
   <dgm:whole/>
@@ -2078,8 +2285,8 @@
       </dsp:nvSpPr>
       <dsp:spPr>
         <a:xfrm>
-          <a:off x="430609" y="829551"/>
-          <a:ext cx="2455555" cy="1203663"/>
+          <a:off x="425223" y="829551"/>
+          <a:ext cx="2151216" cy="1203663"/>
         </a:xfrm>
         <a:prstGeom prst="rect">
           <a:avLst/>
@@ -2128,8 +2335,8 @@
         </a:p>
       </dsp:txBody>
       <dsp:txXfrm>
-        <a:off x="430609" y="829551"/>
-        <a:ext cx="2455555" cy="1203663"/>
+        <a:off x="425223" y="829551"/>
+        <a:ext cx="2151216" cy="1203663"/>
       </dsp:txXfrm>
     </dsp:sp>
     <dsp:sp modelId="{01E41ACE-E33B-41B9-A714-73522D3F7C76}">
@@ -2139,8 +2346,8 @@
       </dsp:nvSpPr>
       <dsp:spPr>
         <a:xfrm>
-          <a:off x="430609" y="406643"/>
-          <a:ext cx="2455555" cy="422908"/>
+          <a:off x="425223" y="406643"/>
+          <a:ext cx="2151216" cy="422908"/>
         </a:xfrm>
         <a:prstGeom prst="rect">
           <a:avLst/>
@@ -2209,8 +2416,8 @@
         </a:p>
       </dsp:txBody>
       <dsp:txXfrm>
-        <a:off x="430609" y="406643"/>
-        <a:ext cx="2455555" cy="422908"/>
+        <a:off x="425223" y="406643"/>
+        <a:ext cx="2151216" cy="422908"/>
       </dsp:txXfrm>
     </dsp:sp>
     <dsp:sp modelId="{CEE8CE24-AD73-4777-BAB3-4A5D9CE74308}">
@@ -2220,7 +2427,7 @@
       </dsp:nvSpPr>
       <dsp:spPr>
         <a:xfrm>
-          <a:off x="219155" y="406643"/>
+          <a:off x="213768" y="406643"/>
           <a:ext cx="0" cy="1626572"/>
         </a:xfrm>
         <a:prstGeom prst="line">
@@ -2261,7 +2468,7 @@
       </dsp:nvSpPr>
       <dsp:spPr>
         <a:xfrm>
-          <a:off x="170520" y="1984580"/>
+          <a:off x="165134" y="1984580"/>
           <a:ext cx="97269" cy="97269"/>
         </a:xfrm>
         <a:prstGeom prst="ellipse">
@@ -2311,8 +2518,8 @@
       </dsp:nvSpPr>
       <dsp:spPr>
         <a:xfrm>
-          <a:off x="1902899" y="3009158"/>
-          <a:ext cx="2455555" cy="650628"/>
+          <a:off x="1715038" y="3009158"/>
+          <a:ext cx="2151216" cy="650628"/>
         </a:xfrm>
         <a:prstGeom prst="rect">
           <a:avLst/>
@@ -2354,14 +2561,15 @@
             <a:buNone/>
           </a:pPr>
           <a:r>
-            <a:rPr lang="es-CO" sz="1500" kern="1200" dirty="0"/>
-            <a:t>JOIN puede “explotar”</a:t>
+            <a:rPr lang="es-CO" sz="1500" kern="1200"/>
+            <a:t>SQL básico</a:t>
           </a:r>
+          <a:endParaRPr lang="es-CO" sz="1500" kern="1200" dirty="0"/>
         </a:p>
       </dsp:txBody>
       <dsp:txXfrm>
-        <a:off x="1902899" y="3009158"/>
-        <a:ext cx="2455555" cy="650628"/>
+        <a:off x="1715038" y="3009158"/>
+        <a:ext cx="2151216" cy="650628"/>
       </dsp:txXfrm>
     </dsp:sp>
     <dsp:sp modelId="{89EF5014-7ECE-4300-A882-B69FFA73745D}">
@@ -2371,8 +2579,8 @@
       </dsp:nvSpPr>
       <dsp:spPr>
         <a:xfrm>
-          <a:off x="1902899" y="2602515"/>
-          <a:ext cx="2455555" cy="406643"/>
+          <a:off x="1715038" y="2602515"/>
+          <a:ext cx="2151216" cy="406643"/>
         </a:xfrm>
         <a:prstGeom prst="rect">
           <a:avLst/>
@@ -2441,8 +2649,8 @@
         </a:p>
       </dsp:txBody>
       <dsp:txXfrm>
-        <a:off x="1902899" y="2602515"/>
-        <a:ext cx="2455555" cy="406643"/>
+        <a:off x="1715038" y="2602515"/>
+        <a:ext cx="2151216" cy="406643"/>
       </dsp:txXfrm>
     </dsp:sp>
     <dsp:sp modelId="{7FC7980B-78D1-4A8D-9208-76052E50D81B}">
@@ -2452,7 +2660,7 @@
       </dsp:nvSpPr>
       <dsp:spPr>
         <a:xfrm>
-          <a:off x="1691444" y="2033215"/>
+          <a:off x="1503584" y="2033215"/>
           <a:ext cx="0" cy="1626572"/>
         </a:xfrm>
         <a:prstGeom prst="line">
@@ -2493,7 +2701,7 @@
       </dsp:nvSpPr>
       <dsp:spPr>
         <a:xfrm>
-          <a:off x="1642810" y="1984580"/>
+          <a:off x="1454949" y="1984580"/>
           <a:ext cx="97269" cy="97269"/>
         </a:xfrm>
         <a:prstGeom prst="ellipse">
@@ -2536,15 +2744,15 @@
         </a:fontRef>
       </dsp:style>
     </dsp:sp>
-    <dsp:sp modelId="{00D2B9ED-BE51-47B3-B26C-BA45F9641DBB}">
+    <dsp:sp modelId="{0C33ADDC-85D4-4DBF-83AE-CB3AB9747E6D}">
       <dsp:nvSpPr>
         <dsp:cNvPr id="0" name=""/>
         <dsp:cNvSpPr/>
       </dsp:nvSpPr>
       <dsp:spPr>
         <a:xfrm>
-          <a:off x="3375188" y="829551"/>
-          <a:ext cx="2455555" cy="1203663"/>
+          <a:off x="3004854" y="829551"/>
+          <a:ext cx="2151216" cy="1203663"/>
         </a:xfrm>
         <a:prstGeom prst="rect">
           <a:avLst/>
@@ -2586,55 +2794,25 @@
             <a:buNone/>
           </a:pPr>
           <a:r>
-            <a:rPr lang="es-CO" sz="1500" kern="1200" dirty="0" err="1"/>
-            <a:t>checks</a:t>
-          </a:r>
-          <a:r>
             <a:rPr lang="es-CO" sz="1500" kern="1200" dirty="0"/>
-            <a:t> + contrato</a:t>
-          </a:r>
-        </a:p>
-        <a:p>
-          <a:pPr marL="0" lvl="0" indent="0" algn="l" defTabSz="666750">
-            <a:lnSpc>
-              <a:spcPct val="90000"/>
-            </a:lnSpc>
-            <a:spcBef>
-              <a:spcPct val="0"/>
-            </a:spcBef>
-            <a:spcAft>
-              <a:spcPct val="35000"/>
-            </a:spcAft>
-            <a:buNone/>
-          </a:pPr>
-          <a:r>
-            <a:rPr lang="es-CO" sz="1500" kern="1200" dirty="0"/>
-            <a:t>Silver/</a:t>
-          </a:r>
-          <a:r>
-            <a:rPr lang="es-CO" sz="1500" kern="1200" dirty="0" err="1"/>
-            <a:t>Bronze</a:t>
-          </a:r>
-          <a:r>
-            <a:rPr lang="es-CO" sz="1500" kern="1200" dirty="0"/>
-            <a:t> estables</a:t>
+            <a:t>JOIN puede “explotar”</a:t>
           </a:r>
         </a:p>
       </dsp:txBody>
       <dsp:txXfrm>
-        <a:off x="3375188" y="829551"/>
-        <a:ext cx="2455555" cy="1203663"/>
+        <a:off x="3004854" y="829551"/>
+        <a:ext cx="2151216" cy="1203663"/>
       </dsp:txXfrm>
     </dsp:sp>
-    <dsp:sp modelId="{2664027A-B5AC-41CA-A071-5DF0CF1E8120}">
+    <dsp:sp modelId="{F60B4A9E-2A40-44D1-A1A8-F4A47B5C2960}">
       <dsp:nvSpPr>
         <dsp:cNvPr id="0" name=""/>
         <dsp:cNvSpPr/>
       </dsp:nvSpPr>
       <dsp:spPr>
         <a:xfrm>
-          <a:off x="3375188" y="406643"/>
-          <a:ext cx="2455555" cy="422908"/>
+          <a:off x="3004854" y="406643"/>
+          <a:ext cx="2151216" cy="422908"/>
         </a:xfrm>
         <a:prstGeom prst="rect">
           <a:avLst/>
@@ -2697,24 +2875,25 @@
             <a:defRPr b="1"/>
           </a:pPr>
           <a:r>
-            <a:rPr lang="es-CO" sz="2000" kern="1200" dirty="0"/>
+            <a:rPr lang="es-CO" sz="2000" kern="1200"/>
             <a:t>W03</a:t>
           </a:r>
+          <a:endParaRPr lang="es-CO" sz="2000" kern="1200" dirty="0"/>
         </a:p>
       </dsp:txBody>
       <dsp:txXfrm>
-        <a:off x="3375188" y="406643"/>
-        <a:ext cx="2455555" cy="422908"/>
+        <a:off x="3004854" y="406643"/>
+        <a:ext cx="2151216" cy="422908"/>
       </dsp:txXfrm>
     </dsp:sp>
-    <dsp:sp modelId="{6F004247-9FD8-4E6D-9363-DE121E4356A0}">
+    <dsp:sp modelId="{46D358C1-2023-4C84-9A53-DF8EDD80A1F7}">
       <dsp:nvSpPr>
         <dsp:cNvPr id="0" name=""/>
         <dsp:cNvSpPr/>
       </dsp:nvSpPr>
       <dsp:spPr>
         <a:xfrm>
-          <a:off x="3163734" y="406643"/>
+          <a:off x="2793400" y="406643"/>
           <a:ext cx="0" cy="1626572"/>
         </a:xfrm>
         <a:prstGeom prst="line">
@@ -2748,14 +2927,14 @@
         <a:fontRef idx="minor"/>
       </dsp:style>
     </dsp:sp>
-    <dsp:sp modelId="{682EA88A-A4E4-4AA7-9FB1-B83F193F2C39}">
+    <dsp:sp modelId="{6B3B44FD-CD55-49A1-9D46-7D8BE7ECC7DC}">
       <dsp:nvSpPr>
         <dsp:cNvPr id="0" name=""/>
         <dsp:cNvSpPr/>
       </dsp:nvSpPr>
       <dsp:spPr>
         <a:xfrm>
-          <a:off x="3115099" y="1984580"/>
+          <a:off x="2744765" y="1984580"/>
           <a:ext cx="97269" cy="97269"/>
         </a:xfrm>
         <a:prstGeom prst="ellipse">
@@ -2798,15 +2977,15 @@
         </a:fontRef>
       </dsp:style>
     </dsp:sp>
-    <dsp:sp modelId="{229A8B9E-D26E-4B8B-B637-778F404FB5B5}">
+    <dsp:sp modelId="{00D2B9ED-BE51-47B3-B26C-BA45F9641DBB}">
       <dsp:nvSpPr>
         <dsp:cNvPr id="0" name=""/>
         <dsp:cNvSpPr/>
       </dsp:nvSpPr>
       <dsp:spPr>
         <a:xfrm>
-          <a:off x="4847478" y="3009158"/>
-          <a:ext cx="2455555" cy="650628"/>
+          <a:off x="4294670" y="3009158"/>
+          <a:ext cx="2151216" cy="650628"/>
         </a:xfrm>
         <a:prstGeom prst="rect">
           <a:avLst/>
@@ -2848,25 +3027,55 @@
             <a:buNone/>
           </a:pPr>
           <a:r>
+            <a:rPr lang="es-CO" sz="1500" kern="1200" dirty="0" err="1"/>
+            <a:t>checks</a:t>
+          </a:r>
+          <a:r>
             <a:rPr lang="es-CO" sz="1500" kern="1200" dirty="0"/>
-            <a:t>performance + EXPLAIN</a:t>
+            <a:t> + contrato</a:t>
+          </a:r>
+        </a:p>
+        <a:p>
+          <a:pPr marL="0" lvl="0" indent="0" algn="l" defTabSz="666750">
+            <a:lnSpc>
+              <a:spcPct val="90000"/>
+            </a:lnSpc>
+            <a:spcBef>
+              <a:spcPct val="0"/>
+            </a:spcBef>
+            <a:spcAft>
+              <a:spcPct val="35000"/>
+            </a:spcAft>
+            <a:buNone/>
+          </a:pPr>
+          <a:r>
+            <a:rPr lang="es-CO" sz="1500" kern="1200" dirty="0"/>
+            <a:t>Silver/</a:t>
+          </a:r>
+          <a:r>
+            <a:rPr lang="es-CO" sz="1500" kern="1200" dirty="0" err="1"/>
+            <a:t>Bronze</a:t>
+          </a:r>
+          <a:r>
+            <a:rPr lang="es-CO" sz="1500" kern="1200" dirty="0"/>
+            <a:t> estables</a:t>
           </a:r>
         </a:p>
       </dsp:txBody>
       <dsp:txXfrm>
-        <a:off x="4847478" y="3009158"/>
-        <a:ext cx="2455555" cy="650628"/>
+        <a:off x="4294670" y="3009158"/>
+        <a:ext cx="2151216" cy="650628"/>
       </dsp:txXfrm>
     </dsp:sp>
-    <dsp:sp modelId="{EE41F65A-AA70-4EE3-81F3-A539EF20984B}">
+    <dsp:sp modelId="{2664027A-B5AC-41CA-A071-5DF0CF1E8120}">
       <dsp:nvSpPr>
         <dsp:cNvPr id="0" name=""/>
         <dsp:cNvSpPr/>
       </dsp:nvSpPr>
       <dsp:spPr>
         <a:xfrm>
-          <a:off x="4847478" y="2602515"/>
-          <a:ext cx="2455555" cy="406643"/>
+          <a:off x="4294670" y="2602515"/>
+          <a:ext cx="2151216" cy="406643"/>
         </a:xfrm>
         <a:prstGeom prst="rect">
           <a:avLst/>
@@ -2935,18 +3144,18 @@
         </a:p>
       </dsp:txBody>
       <dsp:txXfrm>
-        <a:off x="4847478" y="2602515"/>
-        <a:ext cx="2455555" cy="406643"/>
+        <a:off x="4294670" y="2602515"/>
+        <a:ext cx="2151216" cy="406643"/>
       </dsp:txXfrm>
     </dsp:sp>
-    <dsp:sp modelId="{E28909AF-007C-49D7-8958-97FF1699473D}">
+    <dsp:sp modelId="{6F004247-9FD8-4E6D-9363-DE121E4356A0}">
       <dsp:nvSpPr>
         <dsp:cNvPr id="0" name=""/>
         <dsp:cNvSpPr/>
       </dsp:nvSpPr>
       <dsp:spPr>
         <a:xfrm>
-          <a:off x="4636023" y="2033215"/>
+          <a:off x="4083215" y="2033215"/>
           <a:ext cx="0" cy="1626572"/>
         </a:xfrm>
         <a:prstGeom prst="line">
@@ -2980,14 +3189,14 @@
         <a:fontRef idx="minor"/>
       </dsp:style>
     </dsp:sp>
-    <dsp:sp modelId="{410FA866-99AD-47B6-AB30-6629B2F7603F}">
+    <dsp:sp modelId="{682EA88A-A4E4-4AA7-9FB1-B83F193F2C39}">
       <dsp:nvSpPr>
         <dsp:cNvPr id="0" name=""/>
         <dsp:cNvSpPr/>
       </dsp:nvSpPr>
       <dsp:spPr>
         <a:xfrm>
-          <a:off x="4587389" y="1984580"/>
+          <a:off x="4034581" y="1984580"/>
           <a:ext cx="97269" cy="97269"/>
         </a:xfrm>
         <a:prstGeom prst="ellipse">
@@ -3030,15 +3239,15 @@
         </a:fontRef>
       </dsp:style>
     </dsp:sp>
-    <dsp:sp modelId="{A8C61B89-04C1-40B8-A753-92BDABE39300}">
+    <dsp:sp modelId="{229A8B9E-D26E-4B8B-B637-778F404FB5B5}">
       <dsp:nvSpPr>
         <dsp:cNvPr id="0" name=""/>
         <dsp:cNvSpPr/>
       </dsp:nvSpPr>
       <dsp:spPr>
         <a:xfrm>
-          <a:off x="6319767" y="829551"/>
-          <a:ext cx="2455555" cy="1203663"/>
+          <a:off x="5584485" y="829551"/>
+          <a:ext cx="2151216" cy="1203663"/>
         </a:xfrm>
         <a:prstGeom prst="rect">
           <a:avLst/>
@@ -3080,25 +3289,25 @@
             <a:buNone/>
           </a:pPr>
           <a:r>
-            <a:rPr lang="es-CO" sz="1500" b="0" kern="1200" dirty="0"/>
-            <a:t>Diseño relacional mínimo (PK/FK + llaves)</a:t>
+            <a:rPr lang="es-CO" sz="1500" kern="1200" dirty="0"/>
+            <a:t>performance + EXPLAIN</a:t>
           </a:r>
         </a:p>
       </dsp:txBody>
       <dsp:txXfrm>
-        <a:off x="6319767" y="829551"/>
-        <a:ext cx="2455555" cy="1203663"/>
+        <a:off x="5584485" y="829551"/>
+        <a:ext cx="2151216" cy="1203663"/>
       </dsp:txXfrm>
     </dsp:sp>
-    <dsp:sp modelId="{F7F215AA-1548-4946-9818-24CE434B0257}">
+    <dsp:sp modelId="{EE41F65A-AA70-4EE3-81F3-A539EF20984B}">
       <dsp:nvSpPr>
         <dsp:cNvPr id="0" name=""/>
         <dsp:cNvSpPr/>
       </dsp:nvSpPr>
       <dsp:spPr>
         <a:xfrm>
-          <a:off x="6319767" y="406643"/>
-          <a:ext cx="2455555" cy="422908"/>
+          <a:off x="5584485" y="406643"/>
+          <a:ext cx="2151216" cy="422908"/>
         </a:xfrm>
         <a:prstGeom prst="rect">
           <a:avLst/>
@@ -3162,23 +3371,23 @@
           </a:pPr>
           <a:r>
             <a:rPr lang="es-CO" sz="2000" kern="1200" dirty="0"/>
-            <a:t>W05A</a:t>
+            <a:t>W05</a:t>
           </a:r>
         </a:p>
       </dsp:txBody>
       <dsp:txXfrm>
-        <a:off x="6319767" y="406643"/>
-        <a:ext cx="2455555" cy="422908"/>
+        <a:off x="5584485" y="406643"/>
+        <a:ext cx="2151216" cy="422908"/>
       </dsp:txXfrm>
     </dsp:sp>
-    <dsp:sp modelId="{A657FCB3-50B0-4F61-A00C-56D9B387AFBF}">
+    <dsp:sp modelId="{E28909AF-007C-49D7-8958-97FF1699473D}">
       <dsp:nvSpPr>
         <dsp:cNvPr id="0" name=""/>
         <dsp:cNvSpPr/>
       </dsp:nvSpPr>
       <dsp:spPr>
         <a:xfrm>
-          <a:off x="6108313" y="406643"/>
+          <a:off x="5373031" y="406643"/>
           <a:ext cx="0" cy="1626572"/>
         </a:xfrm>
         <a:prstGeom prst="line">
@@ -3212,14 +3421,14 @@
         <a:fontRef idx="minor"/>
       </dsp:style>
     </dsp:sp>
-    <dsp:sp modelId="{D1F0411E-85F0-49A3-90A8-C760162A06F7}">
+    <dsp:sp modelId="{410FA866-99AD-47B6-AB30-6629B2F7603F}">
       <dsp:nvSpPr>
         <dsp:cNvPr id="0" name=""/>
         <dsp:cNvSpPr/>
       </dsp:nvSpPr>
       <dsp:spPr>
         <a:xfrm>
-          <a:off x="6059678" y="1984580"/>
+          <a:off x="5324396" y="1984580"/>
           <a:ext cx="97269" cy="97269"/>
         </a:xfrm>
         <a:prstGeom prst="ellipse">
@@ -3262,15 +3471,15 @@
         </a:fontRef>
       </dsp:style>
     </dsp:sp>
-    <dsp:sp modelId="{7B4887C6-E1B4-4412-86BB-F455A05D8A46}">
+    <dsp:sp modelId="{A8C61B89-04C1-40B8-A753-92BDABE39300}">
       <dsp:nvSpPr>
         <dsp:cNvPr id="0" name=""/>
         <dsp:cNvSpPr/>
       </dsp:nvSpPr>
       <dsp:spPr>
         <a:xfrm>
-          <a:off x="7792057" y="3009158"/>
-          <a:ext cx="2455555" cy="650628"/>
+          <a:off x="6874301" y="3009158"/>
+          <a:ext cx="2151216" cy="650628"/>
         </a:xfrm>
         <a:prstGeom prst="rect">
           <a:avLst/>
@@ -3312,34 +3521,25 @@
             <a:buNone/>
           </a:pPr>
           <a:r>
-            <a:rPr lang="es-ES" sz="1500" b="1" kern="1200" dirty="0"/>
-            <a:t>Gold + </a:t>
+            <a:rPr lang="es-CO" sz="1500" b="0" kern="1200" dirty="0"/>
+            <a:t>Diseño relacional mínimo (PK/FK + llaves)</a:t>
           </a:r>
-          <a:r>
-            <a:rPr lang="es-ES" sz="1500" b="1" kern="1200" dirty="0" err="1"/>
-            <a:t>exports</a:t>
-          </a:r>
-          <a:r>
-            <a:rPr lang="es-ES" sz="1500" b="1" kern="1200" dirty="0"/>
-            <a:t> + documentación final</a:t>
-          </a:r>
-          <a:endParaRPr lang="es-CO" sz="1500" kern="1200" dirty="0"/>
         </a:p>
       </dsp:txBody>
       <dsp:txXfrm>
-        <a:off x="7792057" y="3009158"/>
-        <a:ext cx="2455555" cy="650628"/>
+        <a:off x="6874301" y="3009158"/>
+        <a:ext cx="2151216" cy="650628"/>
       </dsp:txXfrm>
     </dsp:sp>
-    <dsp:sp modelId="{415234FF-8B2B-48A0-B0A8-E0517D1909DD}">
+    <dsp:sp modelId="{F7F215AA-1548-4946-9818-24CE434B0257}">
       <dsp:nvSpPr>
         <dsp:cNvPr id="0" name=""/>
         <dsp:cNvSpPr/>
       </dsp:nvSpPr>
       <dsp:spPr>
         <a:xfrm>
-          <a:off x="7792057" y="2602515"/>
-          <a:ext cx="2455555" cy="406643"/>
+          <a:off x="6874301" y="2602515"/>
+          <a:ext cx="2151216" cy="406643"/>
         </a:xfrm>
         <a:prstGeom prst="rect">
           <a:avLst/>
@@ -3403,13 +3603,254 @@
           </a:pPr>
           <a:r>
             <a:rPr lang="es-CO" sz="2000" kern="1200" dirty="0"/>
-            <a:t>W05B</a:t>
+            <a:t>W06A</a:t>
           </a:r>
         </a:p>
       </dsp:txBody>
       <dsp:txXfrm>
-        <a:off x="7792057" y="2602515"/>
-        <a:ext cx="2455555" cy="406643"/>
+        <a:off x="6874301" y="2602515"/>
+        <a:ext cx="2151216" cy="406643"/>
+      </dsp:txXfrm>
+    </dsp:sp>
+    <dsp:sp modelId="{A657FCB3-50B0-4F61-A00C-56D9B387AFBF}">
+      <dsp:nvSpPr>
+        <dsp:cNvPr id="0" name=""/>
+        <dsp:cNvSpPr/>
+      </dsp:nvSpPr>
+      <dsp:spPr>
+        <a:xfrm>
+          <a:off x="6662846" y="2033215"/>
+          <a:ext cx="0" cy="1626572"/>
+        </a:xfrm>
+        <a:prstGeom prst="line">
+          <a:avLst/>
+        </a:prstGeom>
+        <a:noFill/>
+        <a:ln w="12700" cap="flat" cmpd="sng" algn="ctr">
+          <a:solidFill>
+            <a:schemeClr val="dk2">
+              <a:hueOff val="0"/>
+              <a:satOff val="0"/>
+              <a:lumOff val="0"/>
+              <a:alphaOff val="0"/>
+            </a:schemeClr>
+          </a:solidFill>
+          <a:prstDash val="solid"/>
+          <a:miter lim="800000"/>
+        </a:ln>
+        <a:effectLst/>
+      </dsp:spPr>
+      <dsp:style>
+        <a:lnRef idx="1">
+          <a:scrgbClr r="0" g="0" b="0"/>
+        </a:lnRef>
+        <a:fillRef idx="0">
+          <a:scrgbClr r="0" g="0" b="0"/>
+        </a:fillRef>
+        <a:effectRef idx="0">
+          <a:scrgbClr r="0" g="0" b="0"/>
+        </a:effectRef>
+        <a:fontRef idx="minor"/>
+      </dsp:style>
+    </dsp:sp>
+    <dsp:sp modelId="{D1F0411E-85F0-49A3-90A8-C760162A06F7}">
+      <dsp:nvSpPr>
+        <dsp:cNvPr id="0" name=""/>
+        <dsp:cNvSpPr/>
+      </dsp:nvSpPr>
+      <dsp:spPr>
+        <a:xfrm>
+          <a:off x="6614212" y="1984580"/>
+          <a:ext cx="97269" cy="97269"/>
+        </a:xfrm>
+        <a:prstGeom prst="ellipse">
+          <a:avLst/>
+        </a:prstGeom>
+        <a:solidFill>
+          <a:schemeClr val="accent1">
+            <a:hueOff val="0"/>
+            <a:satOff val="0"/>
+            <a:lumOff val="0"/>
+            <a:alphaOff val="0"/>
+          </a:schemeClr>
+        </a:solidFill>
+        <a:ln w="6350" cap="flat" cmpd="sng" algn="ctr">
+          <a:solidFill>
+            <a:schemeClr val="lt1">
+              <a:hueOff val="0"/>
+              <a:satOff val="0"/>
+              <a:lumOff val="0"/>
+              <a:alphaOff val="0"/>
+            </a:schemeClr>
+          </a:solidFill>
+          <a:prstDash val="solid"/>
+          <a:miter lim="800000"/>
+        </a:ln>
+        <a:effectLst/>
+      </dsp:spPr>
+      <dsp:style>
+        <a:lnRef idx="2">
+          <a:scrgbClr r="0" g="0" b="0"/>
+        </a:lnRef>
+        <a:fillRef idx="1">
+          <a:scrgbClr r="0" g="0" b="0"/>
+        </a:fillRef>
+        <a:effectRef idx="0">
+          <a:scrgbClr r="0" g="0" b="0"/>
+        </a:effectRef>
+        <a:fontRef idx="minor">
+          <a:schemeClr val="lt1"/>
+        </a:fontRef>
+      </dsp:style>
+    </dsp:sp>
+    <dsp:sp modelId="{7B4887C6-E1B4-4412-86BB-F455A05D8A46}">
+      <dsp:nvSpPr>
+        <dsp:cNvPr id="0" name=""/>
+        <dsp:cNvSpPr/>
+      </dsp:nvSpPr>
+      <dsp:spPr>
+        <a:xfrm>
+          <a:off x="8164116" y="829551"/>
+          <a:ext cx="2151216" cy="1203663"/>
+        </a:xfrm>
+        <a:prstGeom prst="rect">
+          <a:avLst/>
+        </a:prstGeom>
+        <a:noFill/>
+        <a:ln>
+          <a:noFill/>
+        </a:ln>
+        <a:effectLst/>
+      </dsp:spPr>
+      <dsp:style>
+        <a:lnRef idx="0">
+          <a:scrgbClr r="0" g="0" b="0"/>
+        </a:lnRef>
+        <a:fillRef idx="0">
+          <a:scrgbClr r="0" g="0" b="0"/>
+        </a:fillRef>
+        <a:effectRef idx="0">
+          <a:scrgbClr r="0" g="0" b="0"/>
+        </a:effectRef>
+        <a:fontRef idx="minor"/>
+      </dsp:style>
+      <dsp:txBody>
+        <a:bodyPr spcFirstLastPara="0" vert="horz" wrap="square" lIns="0" tIns="95250" rIns="95250" bIns="142875" numCol="1" spcCol="1270" anchor="t" anchorCtr="0">
+          <a:noAutofit/>
+        </a:bodyPr>
+        <a:lstStyle/>
+        <a:p>
+          <a:pPr marL="0" lvl="0" indent="0" algn="l" defTabSz="666750">
+            <a:lnSpc>
+              <a:spcPct val="90000"/>
+            </a:lnSpc>
+            <a:spcBef>
+              <a:spcPct val="0"/>
+            </a:spcBef>
+            <a:spcAft>
+              <a:spcPct val="35000"/>
+            </a:spcAft>
+            <a:buNone/>
+          </a:pPr>
+          <a:r>
+            <a:rPr lang="es-ES" sz="1500" b="1" kern="1200" dirty="0"/>
+            <a:t>Gold + </a:t>
+          </a:r>
+          <a:r>
+            <a:rPr lang="es-ES" sz="1500" b="1" kern="1200" dirty="0" err="1"/>
+            <a:t>exports</a:t>
+          </a:r>
+          <a:r>
+            <a:rPr lang="es-ES" sz="1500" b="1" kern="1200" dirty="0"/>
+            <a:t> + documentación final</a:t>
+          </a:r>
+          <a:endParaRPr lang="es-CO" sz="1500" kern="1200" dirty="0"/>
+        </a:p>
+      </dsp:txBody>
+      <dsp:txXfrm>
+        <a:off x="8164116" y="829551"/>
+        <a:ext cx="2151216" cy="1203663"/>
+      </dsp:txXfrm>
+    </dsp:sp>
+    <dsp:sp modelId="{415234FF-8B2B-48A0-B0A8-E0517D1909DD}">
+      <dsp:nvSpPr>
+        <dsp:cNvPr id="0" name=""/>
+        <dsp:cNvSpPr/>
+      </dsp:nvSpPr>
+      <dsp:spPr>
+        <a:xfrm>
+          <a:off x="8164116" y="406643"/>
+          <a:ext cx="2151216" cy="422908"/>
+        </a:xfrm>
+        <a:prstGeom prst="rect">
+          <a:avLst/>
+        </a:prstGeom>
+        <a:solidFill>
+          <a:schemeClr val="accent1">
+            <a:alpha val="0"/>
+            <a:hueOff val="0"/>
+            <a:satOff val="0"/>
+            <a:lumOff val="0"/>
+            <a:alphaOff val="0"/>
+          </a:schemeClr>
+        </a:solidFill>
+        <a:ln w="19050" cap="flat" cmpd="sng" algn="ctr">
+          <a:solidFill>
+            <a:schemeClr val="accent1">
+              <a:alpha val="0"/>
+              <a:hueOff val="0"/>
+              <a:satOff val="0"/>
+              <a:lumOff val="0"/>
+              <a:alphaOff val="0"/>
+            </a:schemeClr>
+          </a:solidFill>
+          <a:prstDash val="solid"/>
+          <a:miter lim="800000"/>
+        </a:ln>
+        <a:effectLst/>
+      </dsp:spPr>
+      <dsp:style>
+        <a:lnRef idx="2">
+          <a:scrgbClr r="0" g="0" b="0"/>
+        </a:lnRef>
+        <a:fillRef idx="1">
+          <a:scrgbClr r="0" g="0" b="0"/>
+        </a:fillRef>
+        <a:effectRef idx="0">
+          <a:scrgbClr r="0" g="0" b="0"/>
+        </a:effectRef>
+        <a:fontRef idx="minor">
+          <a:schemeClr val="lt1"/>
+        </a:fontRef>
+      </dsp:style>
+      <dsp:txBody>
+        <a:bodyPr spcFirstLastPara="0" vert="horz" wrap="square" lIns="0" tIns="0" rIns="127000" bIns="0" numCol="1" spcCol="1270" anchor="ctr" anchorCtr="0">
+          <a:noAutofit/>
+        </a:bodyPr>
+        <a:lstStyle/>
+        <a:p>
+          <a:pPr marL="0" lvl="0" indent="0" algn="l" defTabSz="889000">
+            <a:lnSpc>
+              <a:spcPct val="90000"/>
+            </a:lnSpc>
+            <a:spcBef>
+              <a:spcPct val="0"/>
+            </a:spcBef>
+            <a:spcAft>
+              <a:spcPct val="35000"/>
+            </a:spcAft>
+            <a:buNone/>
+            <a:defRPr b="1"/>
+          </a:pPr>
+          <a:r>
+            <a:rPr lang="es-CO" sz="2000" kern="1200" dirty="0"/>
+            <a:t>W06B</a:t>
+          </a:r>
+        </a:p>
+      </dsp:txBody>
+      <dsp:txXfrm>
+        <a:off x="8164116" y="406643"/>
+        <a:ext cx="2151216" cy="422908"/>
       </dsp:txXfrm>
     </dsp:sp>
     <dsp:sp modelId="{573D2282-3279-4BF1-B7CA-BAB23F064BDC}">
@@ -3419,7 +3860,7 @@
       </dsp:nvSpPr>
       <dsp:spPr>
         <a:xfrm>
-          <a:off x="7580602" y="2033215"/>
+          <a:off x="7952662" y="406643"/>
           <a:ext cx="0" cy="1626572"/>
         </a:xfrm>
         <a:prstGeom prst="line">
@@ -3460,7 +3901,7 @@
       </dsp:nvSpPr>
       <dsp:spPr>
         <a:xfrm>
-          <a:off x="7531968" y="1984580"/>
+          <a:off x="7904028" y="1984580"/>
           <a:ext cx="97269" cy="97269"/>
         </a:xfrm>
         <a:prstGeom prst="ellipse">
@@ -5412,7 +5853,7 @@
           <a:p>
             <a:fld id="{0293CA20-00E4-4CAA-9844-AC15227571C5}" type="datetimeFigureOut">
               <a:rPr lang="es-CO" smtClean="0"/>
-              <a:t>15/02/2026</a:t>
+              <a:t>1/03/2026</a:t>
             </a:fld>
             <a:endParaRPr lang="es-CO"/>
           </a:p>
@@ -6690,7 +7131,7 @@
           <a:p>
             <a:fld id="{C8C7455C-0909-4F9F-995D-5BEB3EC57555}" type="datetimeFigureOut">
               <a:rPr lang="es-CO" smtClean="0"/>
-              <a:t>15/02/2026</a:t>
+              <a:t>1/03/2026</a:t>
             </a:fld>
             <a:endParaRPr lang="es-CO"/>
           </a:p>
@@ -6890,7 +7331,7 @@
           <a:p>
             <a:fld id="{C8C7455C-0909-4F9F-995D-5BEB3EC57555}" type="datetimeFigureOut">
               <a:rPr lang="es-CO" smtClean="0"/>
-              <a:t>15/02/2026</a:t>
+              <a:t>1/03/2026</a:t>
             </a:fld>
             <a:endParaRPr lang="es-CO"/>
           </a:p>
@@ -7100,7 +7541,7 @@
           <a:p>
             <a:fld id="{C8C7455C-0909-4F9F-995D-5BEB3EC57555}" type="datetimeFigureOut">
               <a:rPr lang="es-CO" smtClean="0"/>
-              <a:t>15/02/2026</a:t>
+              <a:t>1/03/2026</a:t>
             </a:fld>
             <a:endParaRPr lang="es-CO"/>
           </a:p>
@@ -7300,7 +7741,7 @@
           <a:p>
             <a:fld id="{C8C7455C-0909-4F9F-995D-5BEB3EC57555}" type="datetimeFigureOut">
               <a:rPr lang="es-CO" smtClean="0"/>
-              <a:t>15/02/2026</a:t>
+              <a:t>1/03/2026</a:t>
             </a:fld>
             <a:endParaRPr lang="es-CO"/>
           </a:p>
@@ -7576,7 +8017,7 @@
           <a:p>
             <a:fld id="{C8C7455C-0909-4F9F-995D-5BEB3EC57555}" type="datetimeFigureOut">
               <a:rPr lang="es-CO" smtClean="0"/>
-              <a:t>15/02/2026</a:t>
+              <a:t>1/03/2026</a:t>
             </a:fld>
             <a:endParaRPr lang="es-CO"/>
           </a:p>
@@ -7844,7 +8285,7 @@
           <a:p>
             <a:fld id="{C8C7455C-0909-4F9F-995D-5BEB3EC57555}" type="datetimeFigureOut">
               <a:rPr lang="es-CO" smtClean="0"/>
-              <a:t>15/02/2026</a:t>
+              <a:t>1/03/2026</a:t>
             </a:fld>
             <a:endParaRPr lang="es-CO"/>
           </a:p>
@@ -8259,7 +8700,7 @@
           <a:p>
             <a:fld id="{C8C7455C-0909-4F9F-995D-5BEB3EC57555}" type="datetimeFigureOut">
               <a:rPr lang="es-CO" smtClean="0"/>
-              <a:t>15/02/2026</a:t>
+              <a:t>1/03/2026</a:t>
             </a:fld>
             <a:endParaRPr lang="es-CO"/>
           </a:p>
@@ -8401,7 +8842,7 @@
           <a:p>
             <a:fld id="{C8C7455C-0909-4F9F-995D-5BEB3EC57555}" type="datetimeFigureOut">
               <a:rPr lang="es-CO" smtClean="0"/>
-              <a:t>15/02/2026</a:t>
+              <a:t>1/03/2026</a:t>
             </a:fld>
             <a:endParaRPr lang="es-CO"/>
           </a:p>
@@ -8514,7 +8955,7 @@
           <a:p>
             <a:fld id="{C8C7455C-0909-4F9F-995D-5BEB3EC57555}" type="datetimeFigureOut">
               <a:rPr lang="es-CO" smtClean="0"/>
-              <a:t>15/02/2026</a:t>
+              <a:t>1/03/2026</a:t>
             </a:fld>
             <a:endParaRPr lang="es-CO"/>
           </a:p>
@@ -8827,7 +9268,7 @@
           <a:p>
             <a:fld id="{C8C7455C-0909-4F9F-995D-5BEB3EC57555}" type="datetimeFigureOut">
               <a:rPr lang="es-CO" smtClean="0"/>
-              <a:t>15/02/2026</a:t>
+              <a:t>1/03/2026</a:t>
             </a:fld>
             <a:endParaRPr lang="es-CO"/>
           </a:p>
@@ -9116,7 +9557,7 @@
           <a:p>
             <a:fld id="{C8C7455C-0909-4F9F-995D-5BEB3EC57555}" type="datetimeFigureOut">
               <a:rPr lang="es-CO" smtClean="0"/>
-              <a:t>15/02/2026</a:t>
+              <a:t>1/03/2026</a:t>
             </a:fld>
             <a:endParaRPr lang="es-CO"/>
           </a:p>
@@ -9359,7 +9800,7 @@
           <a:p>
             <a:fld id="{C8C7455C-0909-4F9F-995D-5BEB3EC57555}" type="datetimeFigureOut">
               <a:rPr lang="es-CO" smtClean="0"/>
-              <a:t>15/02/2026</a:t>
+              <a:t>1/03/2026</a:t>
             </a:fld>
             <a:endParaRPr lang="es-CO"/>
           </a:p>
@@ -10460,7 +10901,7 @@
           <a:p>
             <a:pPr algn="ctr"/>
             <a:r>
-              <a:rPr lang="en-US" sz="3600" b="1" kern="1200">
+              <a:rPr lang="en-US" sz="3600" b="1" kern="1200" dirty="0" err="1">
                 <a:solidFill>
                   <a:srgbClr val="FFFFFF"/>
                 </a:solidFill>
@@ -10468,9 +10909,9 @@
                 <a:ea typeface="+mj-ea"/>
                 <a:cs typeface="+mj-cs"/>
               </a:rPr>
-              <a:t>Entregables H2 (exacto lo que entregan)</a:t>
+              <a:t>Entregables</a:t>
             </a:r>
-            <a:endParaRPr lang="en-US" sz="3600" kern="1200">
+            <a:endParaRPr lang="en-US" sz="3600" kern="1200" dirty="0">
               <a:solidFill>
                 <a:srgbClr val="FFFFFF"/>
               </a:solidFill>
@@ -10828,7 +11269,7 @@
             <p:ph idx="1"/>
             <p:extLst>
               <p:ext uri="{D42A27DB-BD31-4B8C-83A1-F6EECF244321}">
-                <p14:modId xmlns:p14="http://schemas.microsoft.com/office/powerpoint/2010/main" val="3180143913"/>
+                <p14:modId xmlns:p14="http://schemas.microsoft.com/office/powerpoint/2010/main" val="2403795604"/>
               </p:ext>
               <p:ext uri="{E7BDC344-281C-4309-B0C6-D0EE65EED2A8}">
                 <p202:designPr xmlns:p202="http://schemas.microsoft.com/office/powerpoint/2020/02/main">
